--- a/docs/PrepPilot_First_Project_Presentation.pptx
+++ b/docs/PrepPilot_First_Project_Presentation.pptx
@@ -5492,7 +5492,7 @@
     <p:bg>
       <p:bgPr>
         <a:solidFill>
-          <a:srgbClr val="0B0F14"/>
+          <a:srgbClr val="FFFFFF"/>
         </a:solidFill>
         <a:effectLst/>
       </p:bgPr>
@@ -5513,13 +5513,13 @@
         <p:spPr>
           <a:xfrm>
             <a:off x="0" y="0"/>
-            <a:ext cx="12191695" cy="91440"/>
+            <a:ext cx="310896" cy="6858000"/>
           </a:xfrm>
           <a:prstGeom prst="rect">
             <a:avLst/>
           </a:prstGeom>
           <a:solidFill>
-            <a:srgbClr val="3B82F6"/>
+            <a:srgbClr val="D84830"/>
           </a:solidFill>
           <a:ln>
             <a:noFill/>
@@ -5548,9 +5548,53 @@
           </a:p>
         </p:txBody>
       </p:sp>
+      <p:sp>
+        <p:nvSpPr>
+          <p:cNvPr id="3" name="Rectangle 2"/>
+          <p:cNvSpPr/>
+          <p:nvPr/>
+        </p:nvSpPr>
+        <p:spPr>
+          <a:xfrm>
+            <a:off x="0" y="3771900"/>
+            <a:ext cx="310896" cy="3086100"/>
+          </a:xfrm>
+          <a:prstGeom prst="rect">
+            <a:avLst/>
+          </a:prstGeom>
+          <a:solidFill>
+            <a:srgbClr val="3C909C"/>
+          </a:solidFill>
+          <a:ln>
+            <a:noFill/>
+          </a:ln>
+          <a:effectLst/>
+        </p:spPr>
+        <p:style>
+          <a:lnRef idx="1">
+            <a:schemeClr val="accent1"/>
+          </a:lnRef>
+          <a:fillRef idx="3">
+            <a:schemeClr val="accent1"/>
+          </a:fillRef>
+          <a:effectRef idx="2">
+            <a:schemeClr val="accent1"/>
+          </a:effectRef>
+          <a:fontRef idx="minor">
+            <a:schemeClr val="lt1"/>
+          </a:fontRef>
+        </p:style>
+        <p:txBody>
+          <a:bodyPr rtlCol="0" anchor="ctr"/>
+          <a:lstStyle/>
+          <a:p>
+            <a:pPr algn="ctr"/>
+          </a:p>
+        </p:txBody>
+      </p:sp>
       <p:pic>
         <p:nvPicPr>
-          <p:cNvPr id="3" name="Picture 2" descr="vidya-university-logo.png"/>
+          <p:cNvPr id="4" name="Picture 3" descr="vidya-university-logo.png"/>
           <p:cNvPicPr>
             <a:picLocks noChangeAspect="1"/>
           </p:cNvPicPr>
@@ -5564,8 +5608,8 @@
         </p:blipFill>
         <p:spPr>
           <a:xfrm>
-            <a:off x="658368" y="475488"/>
-            <a:ext cx="841248" cy="841248"/>
+            <a:off x="868680" y="475488"/>
+            <a:ext cx="2514600" cy="964474"/>
           </a:xfrm>
           <a:prstGeom prst="rect">
             <a:avLst/>
@@ -5574,14 +5618,14 @@
       </p:pic>
       <p:sp>
         <p:nvSpPr>
-          <p:cNvPr id="4" name="TextBox 3"/>
-          <p:cNvSpPr txBox="1"/>
-          <p:nvPr/>
-        </p:nvSpPr>
-        <p:spPr>
-          <a:xfrm>
-            <a:off x="1682496" y="566928"/>
-            <a:ext cx="5486400" cy="274320"/>
+          <p:cNvPr id="5" name="TextBox 4"/>
+          <p:cNvSpPr txBox="1"/>
+          <p:nvPr/>
+        </p:nvSpPr>
+        <p:spPr>
+          <a:xfrm>
+            <a:off x="868680" y="1517904"/>
+            <a:ext cx="7315200" cy="256032"/>
           </a:xfrm>
           <a:prstGeom prst="rect">
             <a:avLst/>
@@ -5600,27 +5644,27 @@
               </a:lnSpc>
             </a:pPr>
             <a:r>
-              <a:rPr sz="1500" b="1" i="0">
-                <a:solidFill>
-                  <a:srgbClr val="FFFFFF"/>
-                </a:solidFill>
-                <a:latin typeface="Calibri"/>
-              </a:rPr>
-              <a:t>VIDYA UNIVERSITY</a:t>
-            </a:r>
-          </a:p>
-        </p:txBody>
-      </p:sp>
-      <p:sp>
-        <p:nvSpPr>
-          <p:cNvPr id="5" name="TextBox 4"/>
-          <p:cNvSpPr txBox="1"/>
-          <p:nvPr/>
-        </p:nvSpPr>
-        <p:spPr>
-          <a:xfrm>
-            <a:off x="1682496" y="877824"/>
-            <a:ext cx="6400800" cy="274320"/>
+              <a:rPr sz="1300" b="1" i="0">
+                <a:solidFill>
+                  <a:srgbClr val="294A48"/>
+                </a:solidFill>
+                <a:latin typeface="Calibri"/>
+              </a:rPr>
+              <a:t>VIDYA UNIVERSITY, MEERUT</a:t>
+            </a:r>
+          </a:p>
+        </p:txBody>
+      </p:sp>
+      <p:sp>
+        <p:nvSpPr>
+          <p:cNvPr id="6" name="TextBox 5"/>
+          <p:cNvSpPr txBox="1"/>
+          <p:nvPr/>
+        </p:nvSpPr>
+        <p:spPr>
+          <a:xfrm>
+            <a:off x="868680" y="1792224"/>
+            <a:ext cx="7315200" cy="237744"/>
           </a:xfrm>
           <a:prstGeom prst="rect">
             <a:avLst/>
@@ -5639,9 +5683,9 @@
               </a:lnSpc>
             </a:pPr>
             <a:r>
-              <a:rPr sz="1150" b="0" i="0">
-                <a:solidFill>
-                  <a:srgbClr val="9BA7B4"/>
+              <a:rPr sz="1100" b="0" i="0">
+                <a:solidFill>
+                  <a:srgbClr val="4A5568"/>
                 </a:solidFill>
                 <a:latin typeface="Calibri"/>
               </a:rPr>
@@ -5652,138 +5696,20 @@
       </p:sp>
       <p:sp>
         <p:nvSpPr>
-          <p:cNvPr id="6" name="TextBox 5"/>
-          <p:cNvSpPr txBox="1"/>
-          <p:nvPr/>
-        </p:nvSpPr>
-        <p:spPr>
-          <a:xfrm>
-            <a:off x="658368" y="1883664"/>
-            <a:ext cx="8595360" cy="274320"/>
-          </a:xfrm>
-          <a:prstGeom prst="rect">
-            <a:avLst/>
-          </a:prstGeom>
-          <a:noFill/>
-        </p:spPr>
-        <p:txBody>
-          <a:bodyPr wrap="square" lIns="0" rIns="0" tIns="0" bIns="0" anchor="t">
-            <a:spAutoFit/>
-          </a:bodyPr>
-          <a:lstStyle/>
-          <a:p>
-            <a:pPr algn="l">
-              <a:lnSpc>
-                <a:spcPct val="100000"/>
-              </a:lnSpc>
-            </a:pPr>
-            <a:r>
-              <a:rPr sz="1150" b="1" i="0">
-                <a:solidFill>
-                  <a:srgbClr val="06B6D4"/>
-                </a:solidFill>
-                <a:latin typeface="Calibri"/>
-              </a:rPr>
-              <a:t>FIRST PROJECT PRESENTATION  ·  3RD SEMESTER  ·  CSE (AI &amp; ML)</a:t>
-            </a:r>
-          </a:p>
-        </p:txBody>
-      </p:sp>
-      <p:sp>
-        <p:nvSpPr>
-          <p:cNvPr id="7" name="TextBox 6"/>
-          <p:cNvSpPr txBox="1"/>
-          <p:nvPr/>
-        </p:nvSpPr>
-        <p:spPr>
-          <a:xfrm>
-            <a:off x="658368" y="2249424"/>
-            <a:ext cx="8778240" cy="1005840"/>
-          </a:xfrm>
-          <a:prstGeom prst="rect">
-            <a:avLst/>
-          </a:prstGeom>
-          <a:noFill/>
-        </p:spPr>
-        <p:txBody>
-          <a:bodyPr wrap="square" lIns="0" rIns="0" tIns="0" bIns="0" anchor="t">
-            <a:spAutoFit/>
-          </a:bodyPr>
-          <a:lstStyle/>
-          <a:p>
-            <a:pPr algn="l">
-              <a:lnSpc>
-                <a:spcPct val="100000"/>
-              </a:lnSpc>
-            </a:pPr>
-            <a:r>
-              <a:rPr sz="6200" b="1" i="0">
-                <a:solidFill>
-                  <a:srgbClr val="FFFFFF"/>
-                </a:solidFill>
-                <a:latin typeface="Calibri"/>
-              </a:rPr>
-              <a:t>PrepPilot</a:t>
-            </a:r>
-          </a:p>
-        </p:txBody>
-      </p:sp>
-      <p:sp>
-        <p:nvSpPr>
-          <p:cNvPr id="8" name="TextBox 7"/>
-          <p:cNvSpPr txBox="1"/>
-          <p:nvPr/>
-        </p:nvSpPr>
-        <p:spPr>
-          <a:xfrm>
-            <a:off x="658368" y="3310128"/>
-            <a:ext cx="8412480" cy="658368"/>
-          </a:xfrm>
-          <a:prstGeom prst="rect">
-            <a:avLst/>
-          </a:prstGeom>
-          <a:noFill/>
-        </p:spPr>
-        <p:txBody>
-          <a:bodyPr wrap="square" lIns="0" rIns="0" tIns="0" bIns="0" anchor="t">
-            <a:spAutoFit/>
-          </a:bodyPr>
-          <a:lstStyle/>
-          <a:p>
-            <a:pPr algn="l">
-              <a:lnSpc>
-                <a:spcPct val="122000"/>
-              </a:lnSpc>
-            </a:pPr>
-            <a:r>
-              <a:rPr sz="1900" b="0" i="0">
-                <a:solidFill>
-                  <a:srgbClr val="9BA7B4"/>
-                </a:solidFill>
-                <a:latin typeface="Calibri"/>
-              </a:rPr>
-              <a:t>An Offline-First, AI-Assisted Study and
-Examination Preparation Platform</a:t>
-            </a:r>
-          </a:p>
-        </p:txBody>
-      </p:sp>
-      <p:sp>
-        <p:nvSpPr>
-          <p:cNvPr id="9" name="Rectangle 8"/>
+          <p:cNvPr id="7" name="Rectangle 6"/>
           <p:cNvSpPr/>
           <p:nvPr/>
         </p:nvSpPr>
         <p:spPr>
           <a:xfrm>
-            <a:off x="658368" y="4224528"/>
-            <a:ext cx="658368" cy="45720"/>
+            <a:off x="868680" y="2212848"/>
+            <a:ext cx="10664647" cy="18288"/>
           </a:xfrm>
           <a:prstGeom prst="rect">
             <a:avLst/>
           </a:prstGeom>
           <a:solidFill>
-            <a:srgbClr val="3B82F6"/>
+            <a:srgbClr val="DDE3EC"/>
           </a:solidFill>
           <a:ln>
             <a:noFill/>
@@ -5814,13 +5740,174 @@
       </p:sp>
       <p:sp>
         <p:nvSpPr>
+          <p:cNvPr id="8" name="TextBox 7"/>
+          <p:cNvSpPr txBox="1"/>
+          <p:nvPr/>
+        </p:nvSpPr>
+        <p:spPr>
+          <a:xfrm>
+            <a:off x="868680" y="2414016"/>
+            <a:ext cx="8595360" cy="274320"/>
+          </a:xfrm>
+          <a:prstGeom prst="rect">
+            <a:avLst/>
+          </a:prstGeom>
+          <a:noFill/>
+        </p:spPr>
+        <p:txBody>
+          <a:bodyPr wrap="square" lIns="0" rIns="0" tIns="0" bIns="0" anchor="t">
+            <a:spAutoFit/>
+          </a:bodyPr>
+          <a:lstStyle/>
+          <a:p>
+            <a:pPr algn="l">
+              <a:lnSpc>
+                <a:spcPct val="100000"/>
+              </a:lnSpc>
+            </a:pPr>
+            <a:r>
+              <a:rPr sz="1100" b="1" i="0">
+                <a:solidFill>
+                  <a:srgbClr val="D84830"/>
+                </a:solidFill>
+                <a:latin typeface="Calibri"/>
+              </a:rPr>
+              <a:t>FIRST PROJECT PRESENTATION  ·  3RD SEMESTER  ·  CSE (AI &amp; ML)</a:t>
+            </a:r>
+          </a:p>
+        </p:txBody>
+      </p:sp>
+      <p:sp>
+        <p:nvSpPr>
+          <p:cNvPr id="9" name="TextBox 8"/>
+          <p:cNvSpPr txBox="1"/>
+          <p:nvPr/>
+        </p:nvSpPr>
+        <p:spPr>
+          <a:xfrm>
+            <a:off x="868680" y="2743200"/>
+            <a:ext cx="8778240" cy="914400"/>
+          </a:xfrm>
+          <a:prstGeom prst="rect">
+            <a:avLst/>
+          </a:prstGeom>
+          <a:noFill/>
+        </p:spPr>
+        <p:txBody>
+          <a:bodyPr wrap="square" lIns="0" rIns="0" tIns="0" bIns="0" anchor="t">
+            <a:spAutoFit/>
+          </a:bodyPr>
+          <a:lstStyle/>
+          <a:p>
+            <a:pPr algn="l">
+              <a:lnSpc>
+                <a:spcPct val="100000"/>
+              </a:lnSpc>
+            </a:pPr>
+            <a:r>
+              <a:rPr sz="5400" b="1" i="0">
+                <a:solidFill>
+                  <a:srgbClr val="294A48"/>
+                </a:solidFill>
+                <a:latin typeface="Calibri"/>
+              </a:rPr>
+              <a:t>PrepPilot</a:t>
+            </a:r>
+          </a:p>
+        </p:txBody>
+      </p:sp>
+      <p:sp>
+        <p:nvSpPr>
           <p:cNvPr id="10" name="TextBox 9"/>
           <p:cNvSpPr txBox="1"/>
           <p:nvPr/>
         </p:nvSpPr>
         <p:spPr>
           <a:xfrm>
-            <a:off x="658368" y="4535424"/>
+            <a:off x="868680" y="3675887"/>
+            <a:ext cx="7863840" cy="603504"/>
+          </a:xfrm>
+          <a:prstGeom prst="rect">
+            <a:avLst/>
+          </a:prstGeom>
+          <a:noFill/>
+        </p:spPr>
+        <p:txBody>
+          <a:bodyPr wrap="square" lIns="0" rIns="0" tIns="0" bIns="0" anchor="t">
+            <a:spAutoFit/>
+          </a:bodyPr>
+          <a:lstStyle/>
+          <a:p>
+            <a:pPr algn="l">
+              <a:lnSpc>
+                <a:spcPct val="122000"/>
+              </a:lnSpc>
+            </a:pPr>
+            <a:r>
+              <a:rPr sz="1700" b="0" i="0">
+                <a:solidFill>
+                  <a:srgbClr val="4A5568"/>
+                </a:solidFill>
+                <a:latin typeface="Calibri"/>
+              </a:rPr>
+              <a:t>An Offline-First, AI-Assisted Study and Examination Preparation Platform</a:t>
+            </a:r>
+          </a:p>
+        </p:txBody>
+      </p:sp>
+      <p:sp>
+        <p:nvSpPr>
+          <p:cNvPr id="11" name="Rectangle 10"/>
+          <p:cNvSpPr/>
+          <p:nvPr/>
+        </p:nvSpPr>
+        <p:spPr>
+          <a:xfrm>
+            <a:off x="868680" y="4443984"/>
+            <a:ext cx="658368" cy="45720"/>
+          </a:xfrm>
+          <a:prstGeom prst="rect">
+            <a:avLst/>
+          </a:prstGeom>
+          <a:solidFill>
+            <a:srgbClr val="D84830"/>
+          </a:solidFill>
+          <a:ln>
+            <a:noFill/>
+          </a:ln>
+          <a:effectLst/>
+        </p:spPr>
+        <p:style>
+          <a:lnRef idx="1">
+            <a:schemeClr val="accent1"/>
+          </a:lnRef>
+          <a:fillRef idx="3">
+            <a:schemeClr val="accent1"/>
+          </a:fillRef>
+          <a:effectRef idx="2">
+            <a:schemeClr val="accent1"/>
+          </a:effectRef>
+          <a:fontRef idx="minor">
+            <a:schemeClr val="lt1"/>
+          </a:fontRef>
+        </p:style>
+        <p:txBody>
+          <a:bodyPr rtlCol="0" anchor="ctr"/>
+          <a:lstStyle/>
+          <a:p>
+            <a:pPr algn="ctr"/>
+          </a:p>
+        </p:txBody>
+      </p:sp>
+      <p:sp>
+        <p:nvSpPr>
+          <p:cNvPr id="12" name="TextBox 11"/>
+          <p:cNvSpPr txBox="1"/>
+          <p:nvPr/>
+        </p:nvSpPr>
+        <p:spPr>
+          <a:xfrm>
+            <a:off x="868680" y="4718304"/>
             <a:ext cx="2926080" cy="219456"/>
           </a:xfrm>
           <a:prstGeom prst="rect">
@@ -5840,7 +5927,7 @@
               </a:lnSpc>
             </a:pPr>
             <a:r>
-              <a:rPr sz="950" b="1" i="0">
+              <a:rPr sz="900" b="1" i="0">
                 <a:solidFill>
                   <a:srgbClr val="6B7684"/>
                 </a:solidFill>
@@ -5853,14 +5940,14 @@
       </p:sp>
       <p:sp>
         <p:nvSpPr>
-          <p:cNvPr id="11" name="TextBox 10"/>
-          <p:cNvSpPr txBox="1"/>
-          <p:nvPr/>
-        </p:nvSpPr>
-        <p:spPr>
-          <a:xfrm>
-            <a:off x="658368" y="4846320"/>
-            <a:ext cx="2286000" cy="237744"/>
+          <p:cNvPr id="13" name="TextBox 12"/>
+          <p:cNvSpPr txBox="1"/>
+          <p:nvPr/>
+        </p:nvSpPr>
+        <p:spPr>
+          <a:xfrm>
+            <a:off x="868680" y="4992624"/>
+            <a:ext cx="2331720" cy="237744"/>
           </a:xfrm>
           <a:prstGeom prst="rect">
             <a:avLst/>
@@ -5879,9 +5966,9 @@
               </a:lnSpc>
             </a:pPr>
             <a:r>
-              <a:rPr sz="1350" b="1" i="0">
-                <a:solidFill>
-                  <a:srgbClr val="FFFFFF"/>
+              <a:rPr sz="1300" b="1" i="0">
+                <a:solidFill>
+                  <a:srgbClr val="0B0F14"/>
                 </a:solidFill>
                 <a:latin typeface="Calibri"/>
               </a:rPr>
@@ -5892,14 +5979,14 @@
       </p:sp>
       <p:sp>
         <p:nvSpPr>
-          <p:cNvPr id="12" name="TextBox 11"/>
-          <p:cNvSpPr txBox="1"/>
-          <p:nvPr/>
-        </p:nvSpPr>
-        <p:spPr>
-          <a:xfrm>
-            <a:off x="658368" y="5102352"/>
-            <a:ext cx="2286000" cy="182880"/>
+          <p:cNvPr id="14" name="TextBox 13"/>
+          <p:cNvSpPr txBox="1"/>
+          <p:nvPr/>
+        </p:nvSpPr>
+        <p:spPr>
+          <a:xfrm>
+            <a:off x="868680" y="5239512"/>
+            <a:ext cx="2331720" cy="182880"/>
           </a:xfrm>
           <a:prstGeom prst="rect">
             <a:avLst/>
@@ -5931,14 +6018,14 @@
       </p:sp>
       <p:sp>
         <p:nvSpPr>
-          <p:cNvPr id="13" name="TextBox 12"/>
-          <p:cNvSpPr txBox="1"/>
-          <p:nvPr/>
-        </p:nvSpPr>
-        <p:spPr>
-          <a:xfrm>
-            <a:off x="2990087" y="4846320"/>
-            <a:ext cx="2286000" cy="237744"/>
+          <p:cNvPr id="15" name="TextBox 14"/>
+          <p:cNvSpPr txBox="1"/>
+          <p:nvPr/>
+        </p:nvSpPr>
+        <p:spPr>
+          <a:xfrm>
+            <a:off x="3264408" y="4992624"/>
+            <a:ext cx="2331720" cy="237744"/>
           </a:xfrm>
           <a:prstGeom prst="rect">
             <a:avLst/>
@@ -5957,9 +6044,9 @@
               </a:lnSpc>
             </a:pPr>
             <a:r>
-              <a:rPr sz="1350" b="1" i="0">
-                <a:solidFill>
-                  <a:srgbClr val="FFFFFF"/>
+              <a:rPr sz="1300" b="1" i="0">
+                <a:solidFill>
+                  <a:srgbClr val="0B0F14"/>
                 </a:solidFill>
                 <a:latin typeface="Calibri"/>
               </a:rPr>
@@ -5970,14 +6057,14 @@
       </p:sp>
       <p:sp>
         <p:nvSpPr>
-          <p:cNvPr id="14" name="TextBox 13"/>
-          <p:cNvSpPr txBox="1"/>
-          <p:nvPr/>
-        </p:nvSpPr>
-        <p:spPr>
-          <a:xfrm>
-            <a:off x="2990087" y="5102352"/>
-            <a:ext cx="2286000" cy="182880"/>
+          <p:cNvPr id="16" name="TextBox 15"/>
+          <p:cNvSpPr txBox="1"/>
+          <p:nvPr/>
+        </p:nvSpPr>
+        <p:spPr>
+          <a:xfrm>
+            <a:off x="3264408" y="5239512"/>
+            <a:ext cx="2331720" cy="182880"/>
           </a:xfrm>
           <a:prstGeom prst="rect">
             <a:avLst/>
@@ -6009,14 +6096,14 @@
       </p:sp>
       <p:sp>
         <p:nvSpPr>
-          <p:cNvPr id="15" name="TextBox 14"/>
-          <p:cNvSpPr txBox="1"/>
-          <p:nvPr/>
-        </p:nvSpPr>
-        <p:spPr>
-          <a:xfrm>
-            <a:off x="658368" y="5413248"/>
-            <a:ext cx="2286000" cy="237744"/>
+          <p:cNvPr id="17" name="TextBox 16"/>
+          <p:cNvSpPr txBox="1"/>
+          <p:nvPr/>
+        </p:nvSpPr>
+        <p:spPr>
+          <a:xfrm>
+            <a:off x="868680" y="5522976"/>
+            <a:ext cx="2331720" cy="237744"/>
           </a:xfrm>
           <a:prstGeom prst="rect">
             <a:avLst/>
@@ -6035,9 +6122,9 @@
               </a:lnSpc>
             </a:pPr>
             <a:r>
-              <a:rPr sz="1350" b="1" i="0">
-                <a:solidFill>
-                  <a:srgbClr val="FFFFFF"/>
+              <a:rPr sz="1300" b="1" i="0">
+                <a:solidFill>
+                  <a:srgbClr val="0B0F14"/>
                 </a:solidFill>
                 <a:latin typeface="Calibri"/>
               </a:rPr>
@@ -6048,14 +6135,14 @@
       </p:sp>
       <p:sp>
         <p:nvSpPr>
-          <p:cNvPr id="16" name="TextBox 15"/>
-          <p:cNvSpPr txBox="1"/>
-          <p:nvPr/>
-        </p:nvSpPr>
-        <p:spPr>
-          <a:xfrm>
-            <a:off x="658368" y="5669280"/>
-            <a:ext cx="2286000" cy="182880"/>
+          <p:cNvPr id="18" name="TextBox 17"/>
+          <p:cNvSpPr txBox="1"/>
+          <p:nvPr/>
+        </p:nvSpPr>
+        <p:spPr>
+          <a:xfrm>
+            <a:off x="868680" y="5769864"/>
+            <a:ext cx="2331720" cy="182880"/>
           </a:xfrm>
           <a:prstGeom prst="rect">
             <a:avLst/>
@@ -6087,14 +6174,14 @@
       </p:sp>
       <p:sp>
         <p:nvSpPr>
-          <p:cNvPr id="17" name="TextBox 16"/>
-          <p:cNvSpPr txBox="1"/>
-          <p:nvPr/>
-        </p:nvSpPr>
-        <p:spPr>
-          <a:xfrm>
-            <a:off x="2990087" y="5413248"/>
-            <a:ext cx="2286000" cy="237744"/>
+          <p:cNvPr id="19" name="TextBox 18"/>
+          <p:cNvSpPr txBox="1"/>
+          <p:nvPr/>
+        </p:nvSpPr>
+        <p:spPr>
+          <a:xfrm>
+            <a:off x="3264408" y="5522976"/>
+            <a:ext cx="2331720" cy="237744"/>
           </a:xfrm>
           <a:prstGeom prst="rect">
             <a:avLst/>
@@ -6113,9 +6200,9 @@
               </a:lnSpc>
             </a:pPr>
             <a:r>
-              <a:rPr sz="1350" b="1" i="0">
-                <a:solidFill>
-                  <a:srgbClr val="FFFFFF"/>
+              <a:rPr sz="1300" b="1" i="0">
+                <a:solidFill>
+                  <a:srgbClr val="0B0F14"/>
                 </a:solidFill>
                 <a:latin typeface="Calibri"/>
               </a:rPr>
@@ -6126,14 +6213,14 @@
       </p:sp>
       <p:sp>
         <p:nvSpPr>
-          <p:cNvPr id="18" name="TextBox 17"/>
-          <p:cNvSpPr txBox="1"/>
-          <p:nvPr/>
-        </p:nvSpPr>
-        <p:spPr>
-          <a:xfrm>
-            <a:off x="2990087" y="5669280"/>
-            <a:ext cx="2286000" cy="182880"/>
+          <p:cNvPr id="20" name="TextBox 19"/>
+          <p:cNvSpPr txBox="1"/>
+          <p:nvPr/>
+        </p:nvSpPr>
+        <p:spPr>
+          <a:xfrm>
+            <a:off x="3264408" y="5769864"/>
+            <a:ext cx="2331720" cy="182880"/>
           </a:xfrm>
           <a:prstGeom prst="rect">
             <a:avLst/>
@@ -6165,13 +6252,13 @@
       </p:sp>
       <p:sp>
         <p:nvSpPr>
-          <p:cNvPr id="19" name="TextBox 18"/>
-          <p:cNvSpPr txBox="1"/>
-          <p:nvPr/>
-        </p:nvSpPr>
-        <p:spPr>
-          <a:xfrm>
-            <a:off x="7589520" y="4535424"/>
+          <p:cNvPr id="21" name="TextBox 20"/>
+          <p:cNvSpPr txBox="1"/>
+          <p:nvPr/>
+        </p:nvSpPr>
+        <p:spPr>
+          <a:xfrm>
+            <a:off x="7882127" y="4718304"/>
             <a:ext cx="2743200" cy="219456"/>
           </a:xfrm>
           <a:prstGeom prst="rect">
@@ -6191,7 +6278,7 @@
               </a:lnSpc>
             </a:pPr>
             <a:r>
-              <a:rPr sz="950" b="1" i="0">
+              <a:rPr sz="900" b="1" i="0">
                 <a:solidFill>
                   <a:srgbClr val="6B7684"/>
                 </a:solidFill>
@@ -6204,13 +6291,130 @@
       </p:sp>
       <p:sp>
         <p:nvSpPr>
-          <p:cNvPr id="20" name="TextBox 19"/>
-          <p:cNvSpPr txBox="1"/>
-          <p:nvPr/>
-        </p:nvSpPr>
-        <p:spPr>
-          <a:xfrm>
-            <a:off x="7589520" y="4846320"/>
+          <p:cNvPr id="22" name="TextBox 21"/>
+          <p:cNvSpPr txBox="1"/>
+          <p:nvPr/>
+        </p:nvSpPr>
+        <p:spPr>
+          <a:xfrm>
+            <a:off x="7882127" y="4974336"/>
+            <a:ext cx="3108960" cy="274320"/>
+          </a:xfrm>
+          <a:prstGeom prst="rect">
+            <a:avLst/>
+          </a:prstGeom>
+          <a:noFill/>
+        </p:spPr>
+        <p:txBody>
+          <a:bodyPr wrap="square" lIns="0" rIns="0" tIns="0" bIns="0" anchor="t">
+            <a:spAutoFit/>
+          </a:bodyPr>
+          <a:lstStyle/>
+          <a:p>
+            <a:pPr algn="l">
+              <a:lnSpc>
+                <a:spcPct val="100000"/>
+              </a:lnSpc>
+            </a:pPr>
+            <a:r>
+              <a:rPr sz="1450" b="1" i="0">
+                <a:solidFill>
+                  <a:srgbClr val="0B0F14"/>
+                </a:solidFill>
+                <a:latin typeface="Calibri"/>
+              </a:rPr>
+              <a:t>Ms. Kareena</a:t>
+            </a:r>
+          </a:p>
+        </p:txBody>
+      </p:sp>
+      <p:sp>
+        <p:nvSpPr>
+          <p:cNvPr id="23" name="TextBox 22"/>
+          <p:cNvSpPr txBox="1"/>
+          <p:nvPr/>
+        </p:nvSpPr>
+        <p:spPr>
+          <a:xfrm>
+            <a:off x="7882127" y="5266944"/>
+            <a:ext cx="3291840" cy="219456"/>
+          </a:xfrm>
+          <a:prstGeom prst="rect">
+            <a:avLst/>
+          </a:prstGeom>
+          <a:noFill/>
+        </p:spPr>
+        <p:txBody>
+          <a:bodyPr wrap="square" lIns="0" rIns="0" tIns="0" bIns="0" anchor="t">
+            <a:spAutoFit/>
+          </a:bodyPr>
+          <a:lstStyle/>
+          <a:p>
+            <a:pPr algn="l">
+              <a:lnSpc>
+                <a:spcPct val="100000"/>
+              </a:lnSpc>
+            </a:pPr>
+            <a:r>
+              <a:rPr sz="900" b="0" i="0">
+                <a:solidFill>
+                  <a:srgbClr val="6B7684"/>
+                </a:solidFill>
+                <a:latin typeface="Calibri"/>
+              </a:rPr>
+              <a:t>Dept. of Computer Science &amp; Engineering</a:t>
+            </a:r>
+          </a:p>
+        </p:txBody>
+      </p:sp>
+      <p:sp>
+        <p:nvSpPr>
+          <p:cNvPr id="24" name="TextBox 23"/>
+          <p:cNvSpPr txBox="1"/>
+          <p:nvPr/>
+        </p:nvSpPr>
+        <p:spPr>
+          <a:xfrm>
+            <a:off x="7882127" y="5614416"/>
+            <a:ext cx="2743200" cy="219456"/>
+          </a:xfrm>
+          <a:prstGeom prst="rect">
+            <a:avLst/>
+          </a:prstGeom>
+          <a:noFill/>
+        </p:spPr>
+        <p:txBody>
+          <a:bodyPr wrap="square" lIns="0" rIns="0" tIns="0" bIns="0" anchor="t">
+            <a:spAutoFit/>
+          </a:bodyPr>
+          <a:lstStyle/>
+          <a:p>
+            <a:pPr algn="l">
+              <a:lnSpc>
+                <a:spcPct val="100000"/>
+              </a:lnSpc>
+            </a:pPr>
+            <a:r>
+              <a:rPr sz="900" b="1" i="0">
+                <a:solidFill>
+                  <a:srgbClr val="6B7684"/>
+                </a:solidFill>
+                <a:latin typeface="Calibri"/>
+              </a:rPr>
+              <a:t>SUBMISSION DATE</a:t>
+            </a:r>
+          </a:p>
+        </p:txBody>
+      </p:sp>
+      <p:sp>
+        <p:nvSpPr>
+          <p:cNvPr id="25" name="TextBox 24"/>
+          <p:cNvSpPr txBox="1"/>
+          <p:nvPr/>
+        </p:nvSpPr>
+        <p:spPr>
+          <a:xfrm>
+            <a:off x="7882127" y="5870448"/>
             <a:ext cx="2743200" cy="274320"/>
           </a:xfrm>
           <a:prstGeom prst="rect">
@@ -6230,126 +6434,9 @@
               </a:lnSpc>
             </a:pPr>
             <a:r>
-              <a:rPr sz="1500" b="1" i="0">
-                <a:solidFill>
-                  <a:srgbClr val="FFFFFF"/>
-                </a:solidFill>
-                <a:latin typeface="Calibri"/>
-              </a:rPr>
-              <a:t>Ms. Kareena</a:t>
-            </a:r>
-          </a:p>
-        </p:txBody>
-      </p:sp>
-      <p:sp>
-        <p:nvSpPr>
-          <p:cNvPr id="21" name="TextBox 20"/>
-          <p:cNvSpPr txBox="1"/>
-          <p:nvPr/>
-        </p:nvSpPr>
-        <p:spPr>
-          <a:xfrm>
-            <a:off x="7589520" y="5138928"/>
-            <a:ext cx="3108960" cy="219456"/>
-          </a:xfrm>
-          <a:prstGeom prst="rect">
-            <a:avLst/>
-          </a:prstGeom>
-          <a:noFill/>
-        </p:spPr>
-        <p:txBody>
-          <a:bodyPr wrap="square" lIns="0" rIns="0" tIns="0" bIns="0" anchor="t">
-            <a:spAutoFit/>
-          </a:bodyPr>
-          <a:lstStyle/>
-          <a:p>
-            <a:pPr algn="l">
-              <a:lnSpc>
-                <a:spcPct val="100000"/>
-              </a:lnSpc>
-            </a:pPr>
-            <a:r>
-              <a:rPr sz="950" b="0" i="0">
-                <a:solidFill>
-                  <a:srgbClr val="6B7684"/>
-                </a:solidFill>
-                <a:latin typeface="Calibri"/>
-              </a:rPr>
-              <a:t>Dept. of Computer Science &amp; Engineering</a:t>
-            </a:r>
-          </a:p>
-        </p:txBody>
-      </p:sp>
-      <p:sp>
-        <p:nvSpPr>
-          <p:cNvPr id="22" name="TextBox 21"/>
-          <p:cNvSpPr txBox="1"/>
-          <p:nvPr/>
-        </p:nvSpPr>
-        <p:spPr>
-          <a:xfrm>
-            <a:off x="7589520" y="5577840"/>
-            <a:ext cx="2743200" cy="219456"/>
-          </a:xfrm>
-          <a:prstGeom prst="rect">
-            <a:avLst/>
-          </a:prstGeom>
-          <a:noFill/>
-        </p:spPr>
-        <p:txBody>
-          <a:bodyPr wrap="square" lIns="0" rIns="0" tIns="0" bIns="0" anchor="t">
-            <a:spAutoFit/>
-          </a:bodyPr>
-          <a:lstStyle/>
-          <a:p>
-            <a:pPr algn="l">
-              <a:lnSpc>
-                <a:spcPct val="100000"/>
-              </a:lnSpc>
-            </a:pPr>
-            <a:r>
-              <a:rPr sz="950" b="1" i="0">
-                <a:solidFill>
-                  <a:srgbClr val="6B7684"/>
-                </a:solidFill>
-                <a:latin typeface="Calibri"/>
-              </a:rPr>
-              <a:t>SUBMISSION DATE</a:t>
-            </a:r>
-          </a:p>
-        </p:txBody>
-      </p:sp>
-      <p:sp>
-        <p:nvSpPr>
-          <p:cNvPr id="23" name="TextBox 22"/>
-          <p:cNvSpPr txBox="1"/>
-          <p:nvPr/>
-        </p:nvSpPr>
-        <p:spPr>
-          <a:xfrm>
-            <a:off x="7589520" y="5815584"/>
-            <a:ext cx="2743200" cy="274320"/>
-          </a:xfrm>
-          <a:prstGeom prst="rect">
-            <a:avLst/>
-          </a:prstGeom>
-          <a:noFill/>
-        </p:spPr>
-        <p:txBody>
-          <a:bodyPr wrap="square" lIns="0" rIns="0" tIns="0" bIns="0" anchor="t">
-            <a:spAutoFit/>
-          </a:bodyPr>
-          <a:lstStyle/>
-          <a:p>
-            <a:pPr algn="l">
-              <a:lnSpc>
-                <a:spcPct val="100000"/>
-              </a:lnSpc>
-            </a:pPr>
-            <a:r>
-              <a:rPr sz="1350" b="1" i="0">
-                <a:solidFill>
-                  <a:srgbClr val="FFFFFF"/>
+              <a:rPr sz="1300" b="1" i="0">
+                <a:solidFill>
+                  <a:srgbClr val="0B0F14"/>
                 </a:solidFill>
                 <a:latin typeface="Calibri"/>
               </a:rPr>
@@ -6360,7 +6447,7 @@
       </p:sp>
       <p:pic>
         <p:nvPicPr>
-          <p:cNvPr id="24" name="Picture 23" descr="preppilot-logo.png"/>
+          <p:cNvPr id="26" name="Picture 25" descr="preppilot-icon.png"/>
           <p:cNvPicPr>
             <a:picLocks noChangeAspect="1"/>
           </p:cNvPicPr>
@@ -6374,14 +6461,53 @@
         </p:blipFill>
         <p:spPr>
           <a:xfrm>
-            <a:off x="10561320" y="2103120"/>
-            <a:ext cx="1051560" cy="1051560"/>
+            <a:off x="10241280" y="2487168"/>
+            <a:ext cx="1188720" cy="1188720"/>
           </a:xfrm>
           <a:prstGeom prst="rect">
             <a:avLst/>
           </a:prstGeom>
         </p:spPr>
       </p:pic>
+      <p:sp>
+        <p:nvSpPr>
+          <p:cNvPr id="27" name="TextBox 26"/>
+          <p:cNvSpPr txBox="1"/>
+          <p:nvPr/>
+        </p:nvSpPr>
+        <p:spPr>
+          <a:xfrm>
+            <a:off x="658368" y="6473952"/>
+            <a:ext cx="7315200" cy="219456"/>
+          </a:xfrm>
+          <a:prstGeom prst="rect">
+            <a:avLst/>
+          </a:prstGeom>
+          <a:noFill/>
+        </p:spPr>
+        <p:txBody>
+          <a:bodyPr wrap="square" lIns="0" rIns="0" tIns="0" bIns="0" anchor="t">
+            <a:spAutoFit/>
+          </a:bodyPr>
+          <a:lstStyle/>
+          <a:p>
+            <a:pPr algn="l">
+              <a:lnSpc>
+                <a:spcPct val="100000"/>
+              </a:lnSpc>
+            </a:pPr>
+            <a:r>
+              <a:rPr sz="850" b="0" i="0">
+                <a:solidFill>
+                  <a:srgbClr val="6B7684"/>
+                </a:solidFill>
+                <a:latin typeface="Calibri"/>
+              </a:rPr>
+              <a:t>Baghpat Road, Delhi-Meerut Bypass, Meerut, U.P., India-250002</a:t>
+            </a:r>
+          </a:p>
+        </p:txBody>
+      </p:sp>
     </p:spTree>
   </p:cSld>
   <p:clrMapOvr>
@@ -6417,7 +6543,7 @@
         <p:spPr>
           <a:xfrm>
             <a:off x="658368" y="420624"/>
-            <a:ext cx="9777679" cy="219456"/>
+            <a:ext cx="9411919" cy="219456"/>
           </a:xfrm>
           <a:prstGeom prst="rect">
             <a:avLst/>
@@ -6438,7 +6564,7 @@
             <a:r>
               <a:rPr sz="1050" b="1" i="0">
                 <a:solidFill>
-                  <a:srgbClr val="3B82F6"/>
+                  <a:srgbClr val="D84830"/>
                 </a:solidFill>
                 <a:latin typeface="Calibri"/>
               </a:rPr>
@@ -6456,7 +6582,7 @@
         <p:spPr>
           <a:xfrm>
             <a:off x="658368" y="640080"/>
-            <a:ext cx="9777679" cy="457200"/>
+            <a:ext cx="9411919" cy="457200"/>
           </a:xfrm>
           <a:prstGeom prst="rect">
             <a:avLst/>
@@ -6477,7 +6603,7 @@
             <a:r>
               <a:rPr sz="2700" b="1" i="0">
                 <a:solidFill>
-                  <a:srgbClr val="1E2A38"/>
+                  <a:srgbClr val="294A48"/>
                 </a:solidFill>
                 <a:latin typeface="Calibri"/>
               </a:rPr>
@@ -6501,7 +6627,7 @@
             <a:avLst/>
           </a:prstGeom>
           <a:solidFill>
-            <a:srgbClr val="3B82F6"/>
+            <a:srgbClr val="D84830"/>
           </a:solidFill>
           <a:ln>
             <a:noFill/>
@@ -6546,8 +6672,8 @@
         </p:blipFill>
         <p:spPr>
           <a:xfrm>
-            <a:off x="11057839" y="365760"/>
-            <a:ext cx="475488" cy="475488"/>
+            <a:off x="10344607" y="384048"/>
+            <a:ext cx="1188720" cy="455933"/>
           </a:xfrm>
           <a:prstGeom prst="rect">
             <a:avLst/>
@@ -6563,7 +6689,7 @@
         <p:spPr>
           <a:xfrm>
             <a:off x="658368" y="6455664"/>
-            <a:ext cx="5486400" cy="219456"/>
+            <a:ext cx="6400800" cy="219456"/>
           </a:xfrm>
           <a:prstGeom prst="rect">
             <a:avLst/>
@@ -6588,7 +6714,7 @@
                 </a:solidFill>
                 <a:latin typeface="Calibri"/>
               </a:rPr>
-              <a:t>PrepPilot  ·  Vidya University  ·  Dept. of Computer Science &amp; Engineering</a:t>
+              <a:t>PrepPilot  ·  Vidya University, Meerut  ·  Dept. of Computer Science &amp; Engineering</a:t>
             </a:r>
           </a:p>
         </p:txBody>
@@ -7595,7 +7721,7 @@
         <p:spPr>
           <a:xfrm>
             <a:off x="658368" y="420624"/>
-            <a:ext cx="9777679" cy="219456"/>
+            <a:ext cx="9411919" cy="219456"/>
           </a:xfrm>
           <a:prstGeom prst="rect">
             <a:avLst/>
@@ -7616,7 +7742,7 @@
             <a:r>
               <a:rPr sz="1050" b="1" i="0">
                 <a:solidFill>
-                  <a:srgbClr val="3B82F6"/>
+                  <a:srgbClr val="D84830"/>
                 </a:solidFill>
                 <a:latin typeface="Calibri"/>
               </a:rPr>
@@ -7634,7 +7760,7 @@
         <p:spPr>
           <a:xfrm>
             <a:off x="658368" y="640080"/>
-            <a:ext cx="9777679" cy="457200"/>
+            <a:ext cx="9411919" cy="457200"/>
           </a:xfrm>
           <a:prstGeom prst="rect">
             <a:avLst/>
@@ -7655,7 +7781,7 @@
             <a:r>
               <a:rPr sz="2700" b="1" i="0">
                 <a:solidFill>
-                  <a:srgbClr val="1E2A38"/>
+                  <a:srgbClr val="294A48"/>
                 </a:solidFill>
                 <a:latin typeface="Calibri"/>
               </a:rPr>
@@ -7679,7 +7805,7 @@
             <a:avLst/>
           </a:prstGeom>
           <a:solidFill>
-            <a:srgbClr val="3B82F6"/>
+            <a:srgbClr val="D84830"/>
           </a:solidFill>
           <a:ln>
             <a:noFill/>
@@ -7724,8 +7850,8 @@
         </p:blipFill>
         <p:spPr>
           <a:xfrm>
-            <a:off x="11057839" y="365760"/>
-            <a:ext cx="475488" cy="475488"/>
+            <a:off x="10344607" y="384048"/>
+            <a:ext cx="1188720" cy="455933"/>
           </a:xfrm>
           <a:prstGeom prst="rect">
             <a:avLst/>
@@ -7741,7 +7867,7 @@
         <p:spPr>
           <a:xfrm>
             <a:off x="658368" y="6455664"/>
-            <a:ext cx="5486400" cy="219456"/>
+            <a:ext cx="6400800" cy="219456"/>
           </a:xfrm>
           <a:prstGeom prst="rect">
             <a:avLst/>
@@ -7766,7 +7892,7 @@
                 </a:solidFill>
                 <a:latin typeface="Calibri"/>
               </a:rPr>
-              <a:t>PrepPilot  ·  Vidya University  ·  Dept. of Computer Science &amp; Engineering</a:t>
+              <a:t>PrepPilot  ·  Vidya University, Meerut  ·  Dept. of Computer Science &amp; Engineering</a:t>
             </a:r>
           </a:p>
         </p:txBody>
@@ -8439,7 +8565,7 @@
         <p:spPr>
           <a:xfrm>
             <a:off x="658368" y="420624"/>
-            <a:ext cx="9777679" cy="219456"/>
+            <a:ext cx="9411919" cy="219456"/>
           </a:xfrm>
           <a:prstGeom prst="rect">
             <a:avLst/>
@@ -8460,7 +8586,7 @@
             <a:r>
               <a:rPr sz="1050" b="1" i="0">
                 <a:solidFill>
-                  <a:srgbClr val="3B82F6"/>
+                  <a:srgbClr val="D84830"/>
                 </a:solidFill>
                 <a:latin typeface="Calibri"/>
               </a:rPr>
@@ -8478,7 +8604,7 @@
         <p:spPr>
           <a:xfrm>
             <a:off x="658368" y="640080"/>
-            <a:ext cx="9777679" cy="457200"/>
+            <a:ext cx="9411919" cy="457200"/>
           </a:xfrm>
           <a:prstGeom prst="rect">
             <a:avLst/>
@@ -8499,7 +8625,7 @@
             <a:r>
               <a:rPr sz="2700" b="1" i="0">
                 <a:solidFill>
-                  <a:srgbClr val="1E2A38"/>
+                  <a:srgbClr val="294A48"/>
                 </a:solidFill>
                 <a:latin typeface="Calibri"/>
               </a:rPr>
@@ -8523,7 +8649,7 @@
             <a:avLst/>
           </a:prstGeom>
           <a:solidFill>
-            <a:srgbClr val="3B82F6"/>
+            <a:srgbClr val="D84830"/>
           </a:solidFill>
           <a:ln>
             <a:noFill/>
@@ -8568,8 +8694,8 @@
         </p:blipFill>
         <p:spPr>
           <a:xfrm>
-            <a:off x="11057839" y="365760"/>
-            <a:ext cx="475488" cy="475488"/>
+            <a:off x="10344607" y="384048"/>
+            <a:ext cx="1188720" cy="455933"/>
           </a:xfrm>
           <a:prstGeom prst="rect">
             <a:avLst/>
@@ -8585,7 +8711,7 @@
         <p:spPr>
           <a:xfrm>
             <a:off x="658368" y="6455664"/>
-            <a:ext cx="5486400" cy="219456"/>
+            <a:ext cx="6400800" cy="219456"/>
           </a:xfrm>
           <a:prstGeom prst="rect">
             <a:avLst/>
@@ -8610,7 +8736,7 @@
                 </a:solidFill>
                 <a:latin typeface="Calibri"/>
               </a:rPr>
-              <a:t>PrepPilot  ·  Vidya University  ·  Dept. of Computer Science &amp; Engineering</a:t>
+              <a:t>PrepPilot  ·  Vidya University, Meerut  ·  Dept. of Computer Science &amp; Engineering</a:t>
             </a:r>
           </a:p>
         </p:txBody>
@@ -9615,7 +9741,7 @@
         <p:spPr>
           <a:xfrm>
             <a:off x="658368" y="420624"/>
-            <a:ext cx="9777679" cy="219456"/>
+            <a:ext cx="9411919" cy="219456"/>
           </a:xfrm>
           <a:prstGeom prst="rect">
             <a:avLst/>
@@ -9636,7 +9762,7 @@
             <a:r>
               <a:rPr sz="1050" b="1" i="0">
                 <a:solidFill>
-                  <a:srgbClr val="3B82F6"/>
+                  <a:srgbClr val="D84830"/>
                 </a:solidFill>
                 <a:latin typeface="Calibri"/>
               </a:rPr>
@@ -9654,7 +9780,7 @@
         <p:spPr>
           <a:xfrm>
             <a:off x="658368" y="640080"/>
-            <a:ext cx="9777679" cy="457200"/>
+            <a:ext cx="9411919" cy="457200"/>
           </a:xfrm>
           <a:prstGeom prst="rect">
             <a:avLst/>
@@ -9675,7 +9801,7 @@
             <a:r>
               <a:rPr sz="2700" b="1" i="0">
                 <a:solidFill>
-                  <a:srgbClr val="1E2A38"/>
+                  <a:srgbClr val="294A48"/>
                 </a:solidFill>
                 <a:latin typeface="Calibri"/>
               </a:rPr>
@@ -9699,7 +9825,7 @@
             <a:avLst/>
           </a:prstGeom>
           <a:solidFill>
-            <a:srgbClr val="3B82F6"/>
+            <a:srgbClr val="D84830"/>
           </a:solidFill>
           <a:ln>
             <a:noFill/>
@@ -9744,8 +9870,8 @@
         </p:blipFill>
         <p:spPr>
           <a:xfrm>
-            <a:off x="11057839" y="365760"/>
-            <a:ext cx="475488" cy="475488"/>
+            <a:off x="10344607" y="384048"/>
+            <a:ext cx="1188720" cy="455933"/>
           </a:xfrm>
           <a:prstGeom prst="rect">
             <a:avLst/>
@@ -9761,7 +9887,7 @@
         <p:spPr>
           <a:xfrm>
             <a:off x="658368" y="6455664"/>
-            <a:ext cx="5486400" cy="219456"/>
+            <a:ext cx="6400800" cy="219456"/>
           </a:xfrm>
           <a:prstGeom prst="rect">
             <a:avLst/>
@@ -9786,7 +9912,7 @@
                 </a:solidFill>
                 <a:latin typeface="Calibri"/>
               </a:rPr>
-              <a:t>PrepPilot  ·  Vidya University  ·  Dept. of Computer Science &amp; Engineering</a:t>
+              <a:t>PrepPilot  ·  Vidya University, Meerut  ·  Dept. of Computer Science &amp; Engineering</a:t>
             </a:r>
           </a:p>
         </p:txBody>
@@ -10364,7 +10490,7 @@
         <p:spPr>
           <a:xfrm>
             <a:off x="658368" y="420624"/>
-            <a:ext cx="9777679" cy="219456"/>
+            <a:ext cx="9411919" cy="219456"/>
           </a:xfrm>
           <a:prstGeom prst="rect">
             <a:avLst/>
@@ -10385,7 +10511,7 @@
             <a:r>
               <a:rPr sz="1050" b="1" i="0">
                 <a:solidFill>
-                  <a:srgbClr val="3B82F6"/>
+                  <a:srgbClr val="D84830"/>
                 </a:solidFill>
                 <a:latin typeface="Calibri"/>
               </a:rPr>
@@ -10403,7 +10529,7 @@
         <p:spPr>
           <a:xfrm>
             <a:off x="658368" y="640080"/>
-            <a:ext cx="9777679" cy="457200"/>
+            <a:ext cx="9411919" cy="457200"/>
           </a:xfrm>
           <a:prstGeom prst="rect">
             <a:avLst/>
@@ -10424,7 +10550,7 @@
             <a:r>
               <a:rPr sz="2700" b="1" i="0">
                 <a:solidFill>
-                  <a:srgbClr val="1E2A38"/>
+                  <a:srgbClr val="294A48"/>
                 </a:solidFill>
                 <a:latin typeface="Calibri"/>
               </a:rPr>
@@ -10448,7 +10574,7 @@
             <a:avLst/>
           </a:prstGeom>
           <a:solidFill>
-            <a:srgbClr val="3B82F6"/>
+            <a:srgbClr val="D84830"/>
           </a:solidFill>
           <a:ln>
             <a:noFill/>
@@ -10493,8 +10619,8 @@
         </p:blipFill>
         <p:spPr>
           <a:xfrm>
-            <a:off x="11057839" y="365760"/>
-            <a:ext cx="475488" cy="475488"/>
+            <a:off x="10344607" y="384048"/>
+            <a:ext cx="1188720" cy="455933"/>
           </a:xfrm>
           <a:prstGeom prst="rect">
             <a:avLst/>
@@ -10510,7 +10636,7 @@
         <p:spPr>
           <a:xfrm>
             <a:off x="658368" y="6455664"/>
-            <a:ext cx="5486400" cy="219456"/>
+            <a:ext cx="6400800" cy="219456"/>
           </a:xfrm>
           <a:prstGeom prst="rect">
             <a:avLst/>
@@ -10535,7 +10661,7 @@
                 </a:solidFill>
                 <a:latin typeface="Calibri"/>
               </a:rPr>
-              <a:t>PrepPilot  ·  Vidya University  ·  Dept. of Computer Science &amp; Engineering</a:t>
+              <a:t>PrepPilot  ·  Vidya University, Meerut  ·  Dept. of Computer Science &amp; Engineering</a:t>
             </a:r>
           </a:p>
         </p:txBody>
@@ -11886,7 +12012,7 @@
         <p:spPr>
           <a:xfrm>
             <a:off x="658368" y="420624"/>
-            <a:ext cx="9777679" cy="219456"/>
+            <a:ext cx="9411919" cy="219456"/>
           </a:xfrm>
           <a:prstGeom prst="rect">
             <a:avLst/>
@@ -11907,7 +12033,7 @@
             <a:r>
               <a:rPr sz="1050" b="1" i="0">
                 <a:solidFill>
-                  <a:srgbClr val="3B82F6"/>
+                  <a:srgbClr val="D84830"/>
                 </a:solidFill>
                 <a:latin typeface="Calibri"/>
               </a:rPr>
@@ -11925,7 +12051,7 @@
         <p:spPr>
           <a:xfrm>
             <a:off x="658368" y="640080"/>
-            <a:ext cx="9777679" cy="457200"/>
+            <a:ext cx="9411919" cy="457200"/>
           </a:xfrm>
           <a:prstGeom prst="rect">
             <a:avLst/>
@@ -11946,7 +12072,7 @@
             <a:r>
               <a:rPr sz="2700" b="1" i="0">
                 <a:solidFill>
-                  <a:srgbClr val="1E2A38"/>
+                  <a:srgbClr val="294A48"/>
                 </a:solidFill>
                 <a:latin typeface="Calibri"/>
               </a:rPr>
@@ -11970,7 +12096,7 @@
             <a:avLst/>
           </a:prstGeom>
           <a:solidFill>
-            <a:srgbClr val="3B82F6"/>
+            <a:srgbClr val="D84830"/>
           </a:solidFill>
           <a:ln>
             <a:noFill/>
@@ -12015,8 +12141,8 @@
         </p:blipFill>
         <p:spPr>
           <a:xfrm>
-            <a:off x="11057839" y="365760"/>
-            <a:ext cx="475488" cy="475488"/>
+            <a:off x="10344607" y="384048"/>
+            <a:ext cx="1188720" cy="455933"/>
           </a:xfrm>
           <a:prstGeom prst="rect">
             <a:avLst/>
@@ -12032,7 +12158,7 @@
         <p:spPr>
           <a:xfrm>
             <a:off x="658368" y="6455664"/>
-            <a:ext cx="5486400" cy="219456"/>
+            <a:ext cx="6400800" cy="219456"/>
           </a:xfrm>
           <a:prstGeom prst="rect">
             <a:avLst/>
@@ -12057,7 +12183,7 @@
                 </a:solidFill>
                 <a:latin typeface="Calibri"/>
               </a:rPr>
-              <a:t>PrepPilot  ·  Vidya University  ·  Dept. of Computer Science &amp; Engineering</a:t>
+              <a:t>PrepPilot  ·  Vidya University, Meerut  ·  Dept. of Computer Science &amp; Engineering</a:t>
             </a:r>
           </a:p>
         </p:txBody>
@@ -13269,7 +13395,7 @@
         <p:spPr>
           <a:xfrm>
             <a:off x="658368" y="420624"/>
-            <a:ext cx="9777679" cy="219456"/>
+            <a:ext cx="9411919" cy="219456"/>
           </a:xfrm>
           <a:prstGeom prst="rect">
             <a:avLst/>
@@ -13290,7 +13416,7 @@
             <a:r>
               <a:rPr sz="1050" b="1" i="0">
                 <a:solidFill>
-                  <a:srgbClr val="3B82F6"/>
+                  <a:srgbClr val="D84830"/>
                 </a:solidFill>
                 <a:latin typeface="Calibri"/>
               </a:rPr>
@@ -13308,7 +13434,7 @@
         <p:spPr>
           <a:xfrm>
             <a:off x="658368" y="640080"/>
-            <a:ext cx="9777679" cy="457200"/>
+            <a:ext cx="9411919" cy="457200"/>
           </a:xfrm>
           <a:prstGeom prst="rect">
             <a:avLst/>
@@ -13329,7 +13455,7 @@
             <a:r>
               <a:rPr sz="2700" b="1" i="0">
                 <a:solidFill>
-                  <a:srgbClr val="1E2A38"/>
+                  <a:srgbClr val="294A48"/>
                 </a:solidFill>
                 <a:latin typeface="Calibri"/>
               </a:rPr>
@@ -13353,7 +13479,7 @@
             <a:avLst/>
           </a:prstGeom>
           <a:solidFill>
-            <a:srgbClr val="3B82F6"/>
+            <a:srgbClr val="D84830"/>
           </a:solidFill>
           <a:ln>
             <a:noFill/>
@@ -13398,8 +13524,8 @@
         </p:blipFill>
         <p:spPr>
           <a:xfrm>
-            <a:off x="11057839" y="365760"/>
-            <a:ext cx="475488" cy="475488"/>
+            <a:off x="10344607" y="384048"/>
+            <a:ext cx="1188720" cy="455933"/>
           </a:xfrm>
           <a:prstGeom prst="rect">
             <a:avLst/>
@@ -13415,7 +13541,7 @@
         <p:spPr>
           <a:xfrm>
             <a:off x="658368" y="6455664"/>
-            <a:ext cx="5486400" cy="219456"/>
+            <a:ext cx="6400800" cy="219456"/>
           </a:xfrm>
           <a:prstGeom prst="rect">
             <a:avLst/>
@@ -13440,7 +13566,7 @@
                 </a:solidFill>
                 <a:latin typeface="Calibri"/>
               </a:rPr>
-              <a:t>PrepPilot  ·  Vidya University  ·  Dept. of Computer Science &amp; Engineering</a:t>
+              <a:t>PrepPilot  ·  Vidya University, Meerut  ·  Dept. of Computer Science &amp; Engineering</a:t>
             </a:r>
           </a:p>
         </p:txBody>
@@ -14940,7 +15066,7 @@
         <p:spPr>
           <a:xfrm>
             <a:off x="658368" y="420624"/>
-            <a:ext cx="9777679" cy="219456"/>
+            <a:ext cx="9411919" cy="219456"/>
           </a:xfrm>
           <a:prstGeom prst="rect">
             <a:avLst/>
@@ -14961,7 +15087,7 @@
             <a:r>
               <a:rPr sz="1050" b="1" i="0">
                 <a:solidFill>
-                  <a:srgbClr val="3B82F6"/>
+                  <a:srgbClr val="D84830"/>
                 </a:solidFill>
                 <a:latin typeface="Calibri"/>
               </a:rPr>
@@ -14979,7 +15105,7 @@
         <p:spPr>
           <a:xfrm>
             <a:off x="658368" y="640080"/>
-            <a:ext cx="9777679" cy="457200"/>
+            <a:ext cx="9411919" cy="457200"/>
           </a:xfrm>
           <a:prstGeom prst="rect">
             <a:avLst/>
@@ -15000,7 +15126,7 @@
             <a:r>
               <a:rPr sz="2700" b="1" i="0">
                 <a:solidFill>
-                  <a:srgbClr val="1E2A38"/>
+                  <a:srgbClr val="294A48"/>
                 </a:solidFill>
                 <a:latin typeface="Calibri"/>
               </a:rPr>
@@ -15022,6 +15148,269 @@
           </a:xfrm>
           <a:prstGeom prst="rect">
             <a:avLst/>
+          </a:prstGeom>
+          <a:solidFill>
+            <a:srgbClr val="D84830"/>
+          </a:solidFill>
+          <a:ln>
+            <a:noFill/>
+          </a:ln>
+          <a:effectLst/>
+        </p:spPr>
+        <p:style>
+          <a:lnRef idx="1">
+            <a:schemeClr val="accent1"/>
+          </a:lnRef>
+          <a:fillRef idx="3">
+            <a:schemeClr val="accent1"/>
+          </a:fillRef>
+          <a:effectRef idx="2">
+            <a:schemeClr val="accent1"/>
+          </a:effectRef>
+          <a:fontRef idx="minor">
+            <a:schemeClr val="lt1"/>
+          </a:fontRef>
+        </p:style>
+        <p:txBody>
+          <a:bodyPr rtlCol="0" anchor="ctr"/>
+          <a:lstStyle/>
+          <a:p>
+            <a:pPr algn="ctr"/>
+          </a:p>
+        </p:txBody>
+      </p:sp>
+      <p:pic>
+        <p:nvPicPr>
+          <p:cNvPr id="5" name="Picture 4" descr="vidya-university-logo.png"/>
+          <p:cNvPicPr>
+            <a:picLocks noChangeAspect="1"/>
+          </p:cNvPicPr>
+          <p:nvPr/>
+        </p:nvPicPr>
+        <p:blipFill>
+          <a:blip r:embed="rId2"/>
+          <a:stretch>
+            <a:fillRect/>
+          </a:stretch>
+        </p:blipFill>
+        <p:spPr>
+          <a:xfrm>
+            <a:off x="10344607" y="384048"/>
+            <a:ext cx="1188720" cy="455933"/>
+          </a:xfrm>
+          <a:prstGeom prst="rect">
+            <a:avLst/>
+          </a:prstGeom>
+        </p:spPr>
+      </p:pic>
+      <p:sp>
+        <p:nvSpPr>
+          <p:cNvPr id="6" name="TextBox 5"/>
+          <p:cNvSpPr txBox="1"/>
+          <p:nvPr/>
+        </p:nvSpPr>
+        <p:spPr>
+          <a:xfrm>
+            <a:off x="658368" y="6455664"/>
+            <a:ext cx="6400800" cy="219456"/>
+          </a:xfrm>
+          <a:prstGeom prst="rect">
+            <a:avLst/>
+          </a:prstGeom>
+          <a:noFill/>
+        </p:spPr>
+        <p:txBody>
+          <a:bodyPr wrap="square" lIns="0" rIns="0" tIns="0" bIns="0" anchor="t">
+            <a:spAutoFit/>
+          </a:bodyPr>
+          <a:lstStyle/>
+          <a:p>
+            <a:pPr algn="l">
+              <a:lnSpc>
+                <a:spcPct val="100000"/>
+              </a:lnSpc>
+            </a:pPr>
+            <a:r>
+              <a:rPr sz="850" b="0" i="0">
+                <a:solidFill>
+                  <a:srgbClr val="6B7684"/>
+                </a:solidFill>
+                <a:latin typeface="Calibri"/>
+              </a:rPr>
+              <a:t>PrepPilot  ·  Vidya University, Meerut  ·  Dept. of Computer Science &amp; Engineering</a:t>
+            </a:r>
+          </a:p>
+        </p:txBody>
+      </p:sp>
+      <p:sp>
+        <p:nvSpPr>
+          <p:cNvPr id="7" name="TextBox 6"/>
+          <p:cNvSpPr txBox="1"/>
+          <p:nvPr/>
+        </p:nvSpPr>
+        <p:spPr>
+          <a:xfrm>
+            <a:off x="10436047" y="6455664"/>
+            <a:ext cx="1097280" cy="219456"/>
+          </a:xfrm>
+          <a:prstGeom prst="rect">
+            <a:avLst/>
+          </a:prstGeom>
+          <a:noFill/>
+        </p:spPr>
+        <p:txBody>
+          <a:bodyPr wrap="square" lIns="0" rIns="0" tIns="0" bIns="0" anchor="t">
+            <a:spAutoFit/>
+          </a:bodyPr>
+          <a:lstStyle/>
+          <a:p>
+            <a:pPr algn="r">
+              <a:lnSpc>
+                <a:spcPct val="100000"/>
+              </a:lnSpc>
+            </a:pPr>
+            <a:r>
+              <a:rPr sz="850" b="0" i="0">
+                <a:solidFill>
+                  <a:srgbClr val="6B7684"/>
+                </a:solidFill>
+                <a:latin typeface="Calibri"/>
+              </a:rPr>
+              <a:t>17</a:t>
+            </a:r>
+          </a:p>
+        </p:txBody>
+      </p:sp>
+      <p:sp>
+        <p:nvSpPr>
+          <p:cNvPr id="8" name="Rounded Rectangle 7"/>
+          <p:cNvSpPr/>
+          <p:nvPr/>
+        </p:nvSpPr>
+        <p:spPr>
+          <a:xfrm>
+            <a:off x="658368" y="1389888"/>
+            <a:ext cx="2403271" cy="914400"/>
+          </a:xfrm>
+          <a:prstGeom prst="roundRect">
+            <a:avLst>
+              <a:gd name="adj" fmla="val 10000"/>
+            </a:avLst>
+          </a:prstGeom>
+          <a:solidFill>
+            <a:srgbClr val="A855F7"/>
+          </a:solidFill>
+          <a:ln>
+            <a:noFill/>
+          </a:ln>
+          <a:effectLst/>
+        </p:spPr>
+        <p:style>
+          <a:lnRef idx="1">
+            <a:schemeClr val="accent1"/>
+          </a:lnRef>
+          <a:fillRef idx="3">
+            <a:schemeClr val="accent1"/>
+          </a:fillRef>
+          <a:effectRef idx="2">
+            <a:schemeClr val="accent1"/>
+          </a:effectRef>
+          <a:fontRef idx="minor">
+            <a:schemeClr val="lt1"/>
+          </a:fontRef>
+        </p:style>
+        <p:txBody>
+          <a:bodyPr rtlCol="0" anchor="ctr" wrap="square" lIns="73152" rIns="73152" tIns="0" bIns="0"/>
+          <a:lstStyle/>
+          <a:p>
+            <a:pPr algn="ctr"/>
+            <a:r>
+              <a:rPr sz="1300" b="1">
+                <a:solidFill>
+                  <a:srgbClr val="FFFFFF"/>
+                </a:solidFill>
+                <a:latin typeface="Calibri"/>
+              </a:rPr>
+              <a:t>AI Proposal</a:t>
+            </a:r>
+          </a:p>
+          <a:p>
+            <a:pPr algn="ctr">
+              <a:spcBef>
+                <a:spcPts val="200"/>
+              </a:spcBef>
+            </a:pPr>
+            <a:r>
+              <a:rPr sz="900">
+                <a:solidFill>
+                  <a:srgbClr val="FFFFFF"/>
+                </a:solidFill>
+                <a:latin typeface="Calibri"/>
+              </a:rPr>
+              <a:t>parsed into an inert object</a:t>
+            </a:r>
+          </a:p>
+        </p:txBody>
+      </p:sp>
+      <p:sp>
+        <p:nvSpPr>
+          <p:cNvPr id="9" name="Right Arrow 8"/>
+          <p:cNvSpPr/>
+          <p:nvPr/>
+        </p:nvSpPr>
+        <p:spPr>
+          <a:xfrm>
+            <a:off x="3134791" y="1700784"/>
+            <a:ext cx="274320" cy="219456"/>
+          </a:xfrm>
+          <a:prstGeom prst="rightArrow">
+            <a:avLst/>
+          </a:prstGeom>
+          <a:solidFill>
+            <a:srgbClr val="DDE3EC"/>
+          </a:solidFill>
+          <a:ln>
+            <a:noFill/>
+          </a:ln>
+          <a:effectLst/>
+        </p:spPr>
+        <p:style>
+          <a:lnRef idx="1">
+            <a:schemeClr val="accent1"/>
+          </a:lnRef>
+          <a:fillRef idx="3">
+            <a:schemeClr val="accent1"/>
+          </a:fillRef>
+          <a:effectRef idx="2">
+            <a:schemeClr val="accent1"/>
+          </a:effectRef>
+          <a:fontRef idx="minor">
+            <a:schemeClr val="lt1"/>
+          </a:fontRef>
+        </p:style>
+        <p:txBody>
+          <a:bodyPr rtlCol="0" anchor="ctr"/>
+          <a:lstStyle/>
+          <a:p>
+            <a:pPr algn="ctr"/>
+          </a:p>
+        </p:txBody>
+      </p:sp>
+      <p:sp>
+        <p:nvSpPr>
+          <p:cNvPr id="10" name="Rounded Rectangle 9"/>
+          <p:cNvSpPr/>
+          <p:nvPr/>
+        </p:nvSpPr>
+        <p:spPr>
+          <a:xfrm>
+            <a:off x="3482263" y="1389888"/>
+            <a:ext cx="2403271" cy="914400"/>
+          </a:xfrm>
+          <a:prstGeom prst="roundRect">
+            <a:avLst>
+              <a:gd name="adj" fmla="val 10000"/>
+            </a:avLst>
           </a:prstGeom>
           <a:solidFill>
             <a:srgbClr val="3B82F6"/>
@@ -15046,158 +15435,10 @@
           </a:fontRef>
         </p:style>
         <p:txBody>
-          <a:bodyPr rtlCol="0" anchor="ctr"/>
+          <a:bodyPr rtlCol="0" anchor="ctr" wrap="square" lIns="73152" rIns="73152" tIns="0" bIns="0"/>
           <a:lstStyle/>
           <a:p>
             <a:pPr algn="ctr"/>
-          </a:p>
-        </p:txBody>
-      </p:sp>
-      <p:pic>
-        <p:nvPicPr>
-          <p:cNvPr id="5" name="Picture 4" descr="vidya-university-logo.png"/>
-          <p:cNvPicPr>
-            <a:picLocks noChangeAspect="1"/>
-          </p:cNvPicPr>
-          <p:nvPr/>
-        </p:nvPicPr>
-        <p:blipFill>
-          <a:blip r:embed="rId2"/>
-          <a:stretch>
-            <a:fillRect/>
-          </a:stretch>
-        </p:blipFill>
-        <p:spPr>
-          <a:xfrm>
-            <a:off x="11057839" y="365760"/>
-            <a:ext cx="475488" cy="475488"/>
-          </a:xfrm>
-          <a:prstGeom prst="rect">
-            <a:avLst/>
-          </a:prstGeom>
-        </p:spPr>
-      </p:pic>
-      <p:sp>
-        <p:nvSpPr>
-          <p:cNvPr id="6" name="TextBox 5"/>
-          <p:cNvSpPr txBox="1"/>
-          <p:nvPr/>
-        </p:nvSpPr>
-        <p:spPr>
-          <a:xfrm>
-            <a:off x="658368" y="6455664"/>
-            <a:ext cx="5486400" cy="219456"/>
-          </a:xfrm>
-          <a:prstGeom prst="rect">
-            <a:avLst/>
-          </a:prstGeom>
-          <a:noFill/>
-        </p:spPr>
-        <p:txBody>
-          <a:bodyPr wrap="square" lIns="0" rIns="0" tIns="0" bIns="0" anchor="t">
-            <a:spAutoFit/>
-          </a:bodyPr>
-          <a:lstStyle/>
-          <a:p>
-            <a:pPr algn="l">
-              <a:lnSpc>
-                <a:spcPct val="100000"/>
-              </a:lnSpc>
-            </a:pPr>
-            <a:r>
-              <a:rPr sz="850" b="0" i="0">
-                <a:solidFill>
-                  <a:srgbClr val="6B7684"/>
-                </a:solidFill>
-                <a:latin typeface="Calibri"/>
-              </a:rPr>
-              <a:t>PrepPilot  ·  Vidya University  ·  Dept. of Computer Science &amp; Engineering</a:t>
-            </a:r>
-          </a:p>
-        </p:txBody>
-      </p:sp>
-      <p:sp>
-        <p:nvSpPr>
-          <p:cNvPr id="7" name="TextBox 6"/>
-          <p:cNvSpPr txBox="1"/>
-          <p:nvPr/>
-        </p:nvSpPr>
-        <p:spPr>
-          <a:xfrm>
-            <a:off x="10436047" y="6455664"/>
-            <a:ext cx="1097280" cy="219456"/>
-          </a:xfrm>
-          <a:prstGeom prst="rect">
-            <a:avLst/>
-          </a:prstGeom>
-          <a:noFill/>
-        </p:spPr>
-        <p:txBody>
-          <a:bodyPr wrap="square" lIns="0" rIns="0" tIns="0" bIns="0" anchor="t">
-            <a:spAutoFit/>
-          </a:bodyPr>
-          <a:lstStyle/>
-          <a:p>
-            <a:pPr algn="r">
-              <a:lnSpc>
-                <a:spcPct val="100000"/>
-              </a:lnSpc>
-            </a:pPr>
-            <a:r>
-              <a:rPr sz="850" b="0" i="0">
-                <a:solidFill>
-                  <a:srgbClr val="6B7684"/>
-                </a:solidFill>
-                <a:latin typeface="Calibri"/>
-              </a:rPr>
-              <a:t>17</a:t>
-            </a:r>
-          </a:p>
-        </p:txBody>
-      </p:sp>
-      <p:sp>
-        <p:nvSpPr>
-          <p:cNvPr id="8" name="Rounded Rectangle 7"/>
-          <p:cNvSpPr/>
-          <p:nvPr/>
-        </p:nvSpPr>
-        <p:spPr>
-          <a:xfrm>
-            <a:off x="658368" y="1389888"/>
-            <a:ext cx="2403271" cy="914400"/>
-          </a:xfrm>
-          <a:prstGeom prst="roundRect">
-            <a:avLst>
-              <a:gd name="adj" fmla="val 10000"/>
-            </a:avLst>
-          </a:prstGeom>
-          <a:solidFill>
-            <a:srgbClr val="A855F7"/>
-          </a:solidFill>
-          <a:ln>
-            <a:noFill/>
-          </a:ln>
-          <a:effectLst/>
-        </p:spPr>
-        <p:style>
-          <a:lnRef idx="1">
-            <a:schemeClr val="accent1"/>
-          </a:lnRef>
-          <a:fillRef idx="3">
-            <a:schemeClr val="accent1"/>
-          </a:fillRef>
-          <a:effectRef idx="2">
-            <a:schemeClr val="accent1"/>
-          </a:effectRef>
-          <a:fontRef idx="minor">
-            <a:schemeClr val="lt1"/>
-          </a:fontRef>
-        </p:style>
-        <p:txBody>
-          <a:bodyPr rtlCol="0" anchor="ctr" wrap="square" lIns="73152" rIns="73152" tIns="0" bIns="0"/>
-          <a:lstStyle/>
-          <a:p>
-            <a:pPr algn="ctr"/>
             <a:r>
               <a:rPr sz="1300" b="1">
                 <a:solidFill>
@@ -15205,7 +15446,7 @@
                 </a:solidFill>
                 <a:latin typeface="Calibri"/>
               </a:rPr>
-              <a:t>AI Proposal</a:t>
+              <a:t>User Review</a:t>
             </a:r>
           </a:p>
           <a:p>
@@ -15221,20 +15462,20 @@
                 </a:solidFill>
                 <a:latin typeface="Calibri"/>
               </a:rPr>
-              <a:t>parsed into an inert object</a:t>
-            </a:r>
-          </a:p>
-        </p:txBody>
-      </p:sp>
-      <p:sp>
-        <p:nvSpPr>
-          <p:cNvPr id="9" name="Right Arrow 8"/>
+              <a:t>student sees what would change</a:t>
+            </a:r>
+          </a:p>
+        </p:txBody>
+      </p:sp>
+      <p:sp>
+        <p:nvSpPr>
+          <p:cNvPr id="11" name="Right Arrow 10"/>
           <p:cNvSpPr/>
           <p:nvPr/>
         </p:nvSpPr>
         <p:spPr>
           <a:xfrm>
-            <a:off x="3134791" y="1700784"/>
+            <a:off x="5958687" y="1700784"/>
             <a:ext cx="274320" cy="219456"/>
           </a:xfrm>
           <a:prstGeom prst="rightArrow">
@@ -15272,13 +15513,13 @@
       </p:sp>
       <p:sp>
         <p:nvSpPr>
-          <p:cNvPr id="10" name="Rounded Rectangle 9"/>
+          <p:cNvPr id="12" name="Rounded Rectangle 11"/>
           <p:cNvSpPr/>
           <p:nvPr/>
         </p:nvSpPr>
         <p:spPr>
           <a:xfrm>
-            <a:off x="3482263" y="1389888"/>
+            <a:off x="6306159" y="1389888"/>
             <a:ext cx="2403271" cy="914400"/>
           </a:xfrm>
           <a:prstGeom prst="roundRect">
@@ -15287,7 +15528,7 @@
             </a:avLst>
           </a:prstGeom>
           <a:solidFill>
-            <a:srgbClr val="3B82F6"/>
+            <a:srgbClr val="F59E0B"/>
           </a:solidFill>
           <a:ln>
             <a:noFill/>
@@ -15320,7 +15561,7 @@
                 </a:solidFill>
                 <a:latin typeface="Calibri"/>
               </a:rPr>
-              <a:t>User Review</a:t>
+              <a:t>Confirmation</a:t>
             </a:r>
           </a:p>
           <a:p>
@@ -15336,20 +15577,20 @@
                 </a:solidFill>
                 <a:latin typeface="Calibri"/>
               </a:rPr>
-              <a:t>student sees what would change</a:t>
-            </a:r>
-          </a:p>
-        </p:txBody>
-      </p:sp>
-      <p:sp>
-        <p:nvSpPr>
-          <p:cNvPr id="11" name="Right Arrow 10"/>
+              <a:t>explicit, never implied</a:t>
+            </a:r>
+          </a:p>
+        </p:txBody>
+      </p:sp>
+      <p:sp>
+        <p:nvSpPr>
+          <p:cNvPr id="13" name="Right Arrow 12"/>
           <p:cNvSpPr/>
           <p:nvPr/>
         </p:nvSpPr>
         <p:spPr>
           <a:xfrm>
-            <a:off x="5958687" y="1700784"/>
+            <a:off x="8782583" y="1700784"/>
             <a:ext cx="274320" cy="219456"/>
           </a:xfrm>
           <a:prstGeom prst="rightArrow">
@@ -15387,121 +15628,6 @@
       </p:sp>
       <p:sp>
         <p:nvSpPr>
-          <p:cNvPr id="12" name="Rounded Rectangle 11"/>
-          <p:cNvSpPr/>
-          <p:nvPr/>
-        </p:nvSpPr>
-        <p:spPr>
-          <a:xfrm>
-            <a:off x="6306159" y="1389888"/>
-            <a:ext cx="2403271" cy="914400"/>
-          </a:xfrm>
-          <a:prstGeom prst="roundRect">
-            <a:avLst>
-              <a:gd name="adj" fmla="val 10000"/>
-            </a:avLst>
-          </a:prstGeom>
-          <a:solidFill>
-            <a:srgbClr val="F59E0B"/>
-          </a:solidFill>
-          <a:ln>
-            <a:noFill/>
-          </a:ln>
-          <a:effectLst/>
-        </p:spPr>
-        <p:style>
-          <a:lnRef idx="1">
-            <a:schemeClr val="accent1"/>
-          </a:lnRef>
-          <a:fillRef idx="3">
-            <a:schemeClr val="accent1"/>
-          </a:fillRef>
-          <a:effectRef idx="2">
-            <a:schemeClr val="accent1"/>
-          </a:effectRef>
-          <a:fontRef idx="minor">
-            <a:schemeClr val="lt1"/>
-          </a:fontRef>
-        </p:style>
-        <p:txBody>
-          <a:bodyPr rtlCol="0" anchor="ctr" wrap="square" lIns="73152" rIns="73152" tIns="0" bIns="0"/>
-          <a:lstStyle/>
-          <a:p>
-            <a:pPr algn="ctr"/>
-            <a:r>
-              <a:rPr sz="1300" b="1">
-                <a:solidFill>
-                  <a:srgbClr val="FFFFFF"/>
-                </a:solidFill>
-                <a:latin typeface="Calibri"/>
-              </a:rPr>
-              <a:t>Confirmation</a:t>
-            </a:r>
-          </a:p>
-          <a:p>
-            <a:pPr algn="ctr">
-              <a:spcBef>
-                <a:spcPts val="200"/>
-              </a:spcBef>
-            </a:pPr>
-            <a:r>
-              <a:rPr sz="900">
-                <a:solidFill>
-                  <a:srgbClr val="FFFFFF"/>
-                </a:solidFill>
-                <a:latin typeface="Calibri"/>
-              </a:rPr>
-              <a:t>explicit, never implied</a:t>
-            </a:r>
-          </a:p>
-        </p:txBody>
-      </p:sp>
-      <p:sp>
-        <p:nvSpPr>
-          <p:cNvPr id="13" name="Right Arrow 12"/>
-          <p:cNvSpPr/>
-          <p:nvPr/>
-        </p:nvSpPr>
-        <p:spPr>
-          <a:xfrm>
-            <a:off x="8782583" y="1700784"/>
-            <a:ext cx="274320" cy="219456"/>
-          </a:xfrm>
-          <a:prstGeom prst="rightArrow">
-            <a:avLst/>
-          </a:prstGeom>
-          <a:solidFill>
-            <a:srgbClr val="DDE3EC"/>
-          </a:solidFill>
-          <a:ln>
-            <a:noFill/>
-          </a:ln>
-          <a:effectLst/>
-        </p:spPr>
-        <p:style>
-          <a:lnRef idx="1">
-            <a:schemeClr val="accent1"/>
-          </a:lnRef>
-          <a:fillRef idx="3">
-            <a:schemeClr val="accent1"/>
-          </a:fillRef>
-          <a:effectRef idx="2">
-            <a:schemeClr val="accent1"/>
-          </a:effectRef>
-          <a:fontRef idx="minor">
-            <a:schemeClr val="lt1"/>
-          </a:fontRef>
-        </p:style>
-        <p:txBody>
-          <a:bodyPr rtlCol="0" anchor="ctr"/>
-          <a:lstStyle/>
-          <a:p>
-            <a:pPr algn="ctr"/>
-          </a:p>
-        </p:txBody>
-      </p:sp>
-      <p:sp>
-        <p:nvSpPr>
           <p:cNvPr id="14" name="Rounded Rectangle 13"/>
           <p:cNvSpPr/>
           <p:nvPr/>
@@ -15588,7 +15714,7 @@
             </a:avLst>
           </a:prstGeom>
           <a:solidFill>
-            <a:srgbClr val="1E2A38"/>
+            <a:srgbClr val="294A48"/>
           </a:solidFill>
           <a:ln>
             <a:noFill/>
@@ -16443,7 +16569,7 @@
         <p:spPr>
           <a:xfrm>
             <a:off x="658368" y="420624"/>
-            <a:ext cx="9777679" cy="219456"/>
+            <a:ext cx="9411919" cy="219456"/>
           </a:xfrm>
           <a:prstGeom prst="rect">
             <a:avLst/>
@@ -16464,7 +16590,7 @@
             <a:r>
               <a:rPr sz="1050" b="1" i="0">
                 <a:solidFill>
-                  <a:srgbClr val="3B82F6"/>
+                  <a:srgbClr val="D84830"/>
                 </a:solidFill>
                 <a:latin typeface="Calibri"/>
               </a:rPr>
@@ -16482,7 +16608,7 @@
         <p:spPr>
           <a:xfrm>
             <a:off x="658368" y="640080"/>
-            <a:ext cx="9777679" cy="457200"/>
+            <a:ext cx="9411919" cy="457200"/>
           </a:xfrm>
           <a:prstGeom prst="rect">
             <a:avLst/>
@@ -16503,7 +16629,7 @@
             <a:r>
               <a:rPr sz="2700" b="1" i="0">
                 <a:solidFill>
-                  <a:srgbClr val="1E2A38"/>
+                  <a:srgbClr val="294A48"/>
                 </a:solidFill>
                 <a:latin typeface="Calibri"/>
               </a:rPr>
@@ -16527,7 +16653,7 @@
             <a:avLst/>
           </a:prstGeom>
           <a:solidFill>
-            <a:srgbClr val="3B82F6"/>
+            <a:srgbClr val="D84830"/>
           </a:solidFill>
           <a:ln>
             <a:noFill/>
@@ -16572,8 +16698,8 @@
         </p:blipFill>
         <p:spPr>
           <a:xfrm>
-            <a:off x="11057839" y="365760"/>
-            <a:ext cx="475488" cy="475488"/>
+            <a:off x="10344607" y="384048"/>
+            <a:ext cx="1188720" cy="455933"/>
           </a:xfrm>
           <a:prstGeom prst="rect">
             <a:avLst/>
@@ -16589,7 +16715,7 @@
         <p:spPr>
           <a:xfrm>
             <a:off x="658368" y="6455664"/>
-            <a:ext cx="5486400" cy="219456"/>
+            <a:ext cx="6400800" cy="219456"/>
           </a:xfrm>
           <a:prstGeom prst="rect">
             <a:avLst/>
@@ -16614,7 +16740,7 @@
                 </a:solidFill>
                 <a:latin typeface="Calibri"/>
               </a:rPr>
-              <a:t>PrepPilot  ·  Vidya University  ·  Dept. of Computer Science &amp; Engineering</a:t>
+              <a:t>PrepPilot  ·  Vidya University, Meerut  ·  Dept. of Computer Science &amp; Engineering</a:t>
             </a:r>
           </a:p>
         </p:txBody>
@@ -17860,7 +17986,7 @@
         <p:spPr>
           <a:xfrm>
             <a:off x="658368" y="420624"/>
-            <a:ext cx="9777679" cy="219456"/>
+            <a:ext cx="9411919" cy="219456"/>
           </a:xfrm>
           <a:prstGeom prst="rect">
             <a:avLst/>
@@ -17881,7 +18007,7 @@
             <a:r>
               <a:rPr sz="1050" b="1" i="0">
                 <a:solidFill>
-                  <a:srgbClr val="3B82F6"/>
+                  <a:srgbClr val="D84830"/>
                 </a:solidFill>
                 <a:latin typeface="Calibri"/>
               </a:rPr>
@@ -17899,7 +18025,7 @@
         <p:spPr>
           <a:xfrm>
             <a:off x="658368" y="640080"/>
-            <a:ext cx="9777679" cy="457200"/>
+            <a:ext cx="9411919" cy="457200"/>
           </a:xfrm>
           <a:prstGeom prst="rect">
             <a:avLst/>
@@ -17920,7 +18046,7 @@
             <a:r>
               <a:rPr sz="2700" b="1" i="0">
                 <a:solidFill>
-                  <a:srgbClr val="1E2A38"/>
+                  <a:srgbClr val="294A48"/>
                 </a:solidFill>
                 <a:latin typeface="Calibri"/>
               </a:rPr>
@@ -17944,7 +18070,7 @@
             <a:avLst/>
           </a:prstGeom>
           <a:solidFill>
-            <a:srgbClr val="3B82F6"/>
+            <a:srgbClr val="D84830"/>
           </a:solidFill>
           <a:ln>
             <a:noFill/>
@@ -17989,8 +18115,8 @@
         </p:blipFill>
         <p:spPr>
           <a:xfrm>
-            <a:off x="11057839" y="365760"/>
-            <a:ext cx="475488" cy="475488"/>
+            <a:off x="10344607" y="384048"/>
+            <a:ext cx="1188720" cy="455933"/>
           </a:xfrm>
           <a:prstGeom prst="rect">
             <a:avLst/>
@@ -18006,7 +18132,7 @@
         <p:spPr>
           <a:xfrm>
             <a:off x="658368" y="6455664"/>
-            <a:ext cx="5486400" cy="219456"/>
+            <a:ext cx="6400800" cy="219456"/>
           </a:xfrm>
           <a:prstGeom prst="rect">
             <a:avLst/>
@@ -18031,7 +18157,7 @@
                 </a:solidFill>
                 <a:latin typeface="Calibri"/>
               </a:rPr>
-              <a:t>PrepPilot  ·  Vidya University  ·  Dept. of Computer Science &amp; Engineering</a:t>
+              <a:t>PrepPilot  ·  Vidya University, Meerut  ·  Dept. of Computer Science &amp; Engineering</a:t>
             </a:r>
           </a:p>
         </p:txBody>
@@ -20469,7 +20595,7 @@
         <p:spPr>
           <a:xfrm>
             <a:off x="658368" y="420624"/>
-            <a:ext cx="9777679" cy="219456"/>
+            <a:ext cx="9411919" cy="219456"/>
           </a:xfrm>
           <a:prstGeom prst="rect">
             <a:avLst/>
@@ -20490,7 +20616,7 @@
             <a:r>
               <a:rPr sz="1050" b="1" i="0">
                 <a:solidFill>
-                  <a:srgbClr val="3B82F6"/>
+                  <a:srgbClr val="D84830"/>
                 </a:solidFill>
                 <a:latin typeface="Calibri"/>
               </a:rPr>
@@ -20508,7 +20634,7 @@
         <p:spPr>
           <a:xfrm>
             <a:off x="658368" y="640080"/>
-            <a:ext cx="9777679" cy="457200"/>
+            <a:ext cx="9411919" cy="457200"/>
           </a:xfrm>
           <a:prstGeom prst="rect">
             <a:avLst/>
@@ -20529,7 +20655,7 @@
             <a:r>
               <a:rPr sz="2700" b="1" i="0">
                 <a:solidFill>
-                  <a:srgbClr val="1E2A38"/>
+                  <a:srgbClr val="294A48"/>
                 </a:solidFill>
                 <a:latin typeface="Calibri"/>
               </a:rPr>
@@ -20553,7 +20679,7 @@
             <a:avLst/>
           </a:prstGeom>
           <a:solidFill>
-            <a:srgbClr val="3B82F6"/>
+            <a:srgbClr val="D84830"/>
           </a:solidFill>
           <a:ln>
             <a:noFill/>
@@ -20598,8 +20724,8 @@
         </p:blipFill>
         <p:spPr>
           <a:xfrm>
-            <a:off x="11057839" y="365760"/>
-            <a:ext cx="475488" cy="475488"/>
+            <a:off x="10344607" y="384048"/>
+            <a:ext cx="1188720" cy="455933"/>
           </a:xfrm>
           <a:prstGeom prst="rect">
             <a:avLst/>
@@ -20615,7 +20741,7 @@
         <p:spPr>
           <a:xfrm>
             <a:off x="658368" y="6455664"/>
-            <a:ext cx="5486400" cy="219456"/>
+            <a:ext cx="6400800" cy="219456"/>
           </a:xfrm>
           <a:prstGeom prst="rect">
             <a:avLst/>
@@ -20640,7 +20766,7 @@
                 </a:solidFill>
                 <a:latin typeface="Calibri"/>
               </a:rPr>
-              <a:t>PrepPilot  ·  Vidya University  ·  Dept. of Computer Science &amp; Engineering</a:t>
+              <a:t>PrepPilot  ·  Vidya University, Meerut  ·  Dept. of Computer Science &amp; Engineering</a:t>
             </a:r>
           </a:p>
         </p:txBody>
@@ -21750,7 +21876,7 @@
         <p:spPr>
           <a:xfrm>
             <a:off x="658368" y="420624"/>
-            <a:ext cx="9777679" cy="219456"/>
+            <a:ext cx="9411919" cy="219456"/>
           </a:xfrm>
           <a:prstGeom prst="rect">
             <a:avLst/>
@@ -21771,7 +21897,7 @@
             <a:r>
               <a:rPr sz="1050" b="1" i="0">
                 <a:solidFill>
-                  <a:srgbClr val="3B82F6"/>
+                  <a:srgbClr val="D84830"/>
                 </a:solidFill>
                 <a:latin typeface="Calibri"/>
               </a:rPr>
@@ -21789,7 +21915,7 @@
         <p:spPr>
           <a:xfrm>
             <a:off x="658368" y="640080"/>
-            <a:ext cx="9777679" cy="457200"/>
+            <a:ext cx="9411919" cy="457200"/>
           </a:xfrm>
           <a:prstGeom prst="rect">
             <a:avLst/>
@@ -21810,7 +21936,7 @@
             <a:r>
               <a:rPr sz="2700" b="1" i="0">
                 <a:solidFill>
-                  <a:srgbClr val="1E2A38"/>
+                  <a:srgbClr val="294A48"/>
                 </a:solidFill>
                 <a:latin typeface="Calibri"/>
               </a:rPr>
@@ -21834,7 +21960,7 @@
             <a:avLst/>
           </a:prstGeom>
           <a:solidFill>
-            <a:srgbClr val="3B82F6"/>
+            <a:srgbClr val="D84830"/>
           </a:solidFill>
           <a:ln>
             <a:noFill/>
@@ -21879,8 +22005,8 @@
         </p:blipFill>
         <p:spPr>
           <a:xfrm>
-            <a:off x="11057839" y="365760"/>
-            <a:ext cx="475488" cy="475488"/>
+            <a:off x="10344607" y="384048"/>
+            <a:ext cx="1188720" cy="455933"/>
           </a:xfrm>
           <a:prstGeom prst="rect">
             <a:avLst/>
@@ -21896,7 +22022,7 @@
         <p:spPr>
           <a:xfrm>
             <a:off x="658368" y="6455664"/>
-            <a:ext cx="5486400" cy="219456"/>
+            <a:ext cx="6400800" cy="219456"/>
           </a:xfrm>
           <a:prstGeom prst="rect">
             <a:avLst/>
@@ -21921,7 +22047,7 @@
                 </a:solidFill>
                 <a:latin typeface="Calibri"/>
               </a:rPr>
-              <a:t>PrepPilot  ·  Vidya University  ·  Dept. of Computer Science &amp; Engineering</a:t>
+              <a:t>PrepPilot  ·  Vidya University, Meerut  ·  Dept. of Computer Science &amp; Engineering</a:t>
             </a:r>
           </a:p>
         </p:txBody>
@@ -22903,7 +23029,7 @@
         <p:spPr>
           <a:xfrm>
             <a:off x="658368" y="420624"/>
-            <a:ext cx="9777679" cy="219456"/>
+            <a:ext cx="9411919" cy="219456"/>
           </a:xfrm>
           <a:prstGeom prst="rect">
             <a:avLst/>
@@ -22924,7 +23050,7 @@
             <a:r>
               <a:rPr sz="1050" b="1" i="0">
                 <a:solidFill>
-                  <a:srgbClr val="3B82F6"/>
+                  <a:srgbClr val="D84830"/>
                 </a:solidFill>
                 <a:latin typeface="Calibri"/>
               </a:rPr>
@@ -22942,7 +23068,7 @@
         <p:spPr>
           <a:xfrm>
             <a:off x="658368" y="640080"/>
-            <a:ext cx="9777679" cy="457200"/>
+            <a:ext cx="9411919" cy="457200"/>
           </a:xfrm>
           <a:prstGeom prst="rect">
             <a:avLst/>
@@ -22963,7 +23089,7 @@
             <a:r>
               <a:rPr sz="2700" b="1" i="0">
                 <a:solidFill>
-                  <a:srgbClr val="1E2A38"/>
+                  <a:srgbClr val="294A48"/>
                 </a:solidFill>
                 <a:latin typeface="Calibri"/>
               </a:rPr>
@@ -22987,7 +23113,7 @@
             <a:avLst/>
           </a:prstGeom>
           <a:solidFill>
-            <a:srgbClr val="3B82F6"/>
+            <a:srgbClr val="D84830"/>
           </a:solidFill>
           <a:ln>
             <a:noFill/>
@@ -23032,8 +23158,8 @@
         </p:blipFill>
         <p:spPr>
           <a:xfrm>
-            <a:off x="11057839" y="365760"/>
-            <a:ext cx="475488" cy="475488"/>
+            <a:off x="10344607" y="384048"/>
+            <a:ext cx="1188720" cy="455933"/>
           </a:xfrm>
           <a:prstGeom prst="rect">
             <a:avLst/>
@@ -23049,7 +23175,7 @@
         <p:spPr>
           <a:xfrm>
             <a:off x="658368" y="6455664"/>
-            <a:ext cx="5486400" cy="219456"/>
+            <a:ext cx="6400800" cy="219456"/>
           </a:xfrm>
           <a:prstGeom prst="rect">
             <a:avLst/>
@@ -23074,7 +23200,7 @@
                 </a:solidFill>
                 <a:latin typeface="Calibri"/>
               </a:rPr>
-              <a:t>PrepPilot  ·  Vidya University  ·  Dept. of Computer Science &amp; Engineering</a:t>
+              <a:t>PrepPilot  ·  Vidya University, Meerut  ·  Dept. of Computer Science &amp; Engineering</a:t>
             </a:r>
           </a:p>
         </p:txBody>
@@ -23631,7 +23757,7 @@
             </a:avLst>
           </a:prstGeom>
           <a:solidFill>
-            <a:srgbClr val="1E2A38"/>
+            <a:srgbClr val="294A48"/>
           </a:solidFill>
           <a:ln>
             <a:noFill/>
@@ -24579,7 +24705,7 @@
         <p:spPr>
           <a:xfrm>
             <a:off x="658368" y="420624"/>
-            <a:ext cx="9777679" cy="219456"/>
+            <a:ext cx="9411919" cy="219456"/>
           </a:xfrm>
           <a:prstGeom prst="rect">
             <a:avLst/>
@@ -24600,7 +24726,7 @@
             <a:r>
               <a:rPr sz="1050" b="1" i="0">
                 <a:solidFill>
-                  <a:srgbClr val="3B82F6"/>
+                  <a:srgbClr val="D84830"/>
                 </a:solidFill>
                 <a:latin typeface="Calibri"/>
               </a:rPr>
@@ -24618,7 +24744,7 @@
         <p:spPr>
           <a:xfrm>
             <a:off x="658368" y="640080"/>
-            <a:ext cx="9777679" cy="457200"/>
+            <a:ext cx="9411919" cy="457200"/>
           </a:xfrm>
           <a:prstGeom prst="rect">
             <a:avLst/>
@@ -24639,7 +24765,7 @@
             <a:r>
               <a:rPr sz="2700" b="1" i="0">
                 <a:solidFill>
-                  <a:srgbClr val="1E2A38"/>
+                  <a:srgbClr val="294A48"/>
                 </a:solidFill>
                 <a:latin typeface="Calibri"/>
               </a:rPr>
@@ -24663,7 +24789,7 @@
             <a:avLst/>
           </a:prstGeom>
           <a:solidFill>
-            <a:srgbClr val="3B82F6"/>
+            <a:srgbClr val="D84830"/>
           </a:solidFill>
           <a:ln>
             <a:noFill/>
@@ -24708,8 +24834,8 @@
         </p:blipFill>
         <p:spPr>
           <a:xfrm>
-            <a:off x="11057839" y="365760"/>
-            <a:ext cx="475488" cy="475488"/>
+            <a:off x="10344607" y="384048"/>
+            <a:ext cx="1188720" cy="455933"/>
           </a:xfrm>
           <a:prstGeom prst="rect">
             <a:avLst/>
@@ -24725,7 +24851,7 @@
         <p:spPr>
           <a:xfrm>
             <a:off x="658368" y="6455664"/>
-            <a:ext cx="5486400" cy="219456"/>
+            <a:ext cx="6400800" cy="219456"/>
           </a:xfrm>
           <a:prstGeom prst="rect">
             <a:avLst/>
@@ -24750,7 +24876,7 @@
                 </a:solidFill>
                 <a:latin typeface="Calibri"/>
               </a:rPr>
-              <a:t>PrepPilot  ·  Vidya University  ·  Dept. of Computer Science &amp; Engineering</a:t>
+              <a:t>PrepPilot  ·  Vidya University, Meerut  ·  Dept. of Computer Science &amp; Engineering</a:t>
             </a:r>
           </a:p>
         </p:txBody>
@@ -26834,7 +26960,7 @@
         <p:spPr>
           <a:xfrm>
             <a:off x="658368" y="420624"/>
-            <a:ext cx="9777679" cy="219456"/>
+            <a:ext cx="9411919" cy="219456"/>
           </a:xfrm>
           <a:prstGeom prst="rect">
             <a:avLst/>
@@ -26855,7 +26981,7 @@
             <a:r>
               <a:rPr sz="1050" b="1" i="0">
                 <a:solidFill>
-                  <a:srgbClr val="3B82F6"/>
+                  <a:srgbClr val="D84830"/>
                 </a:solidFill>
                 <a:latin typeface="Calibri"/>
               </a:rPr>
@@ -26873,7 +26999,7 @@
         <p:spPr>
           <a:xfrm>
             <a:off x="658368" y="640080"/>
-            <a:ext cx="9777679" cy="457200"/>
+            <a:ext cx="9411919" cy="457200"/>
           </a:xfrm>
           <a:prstGeom prst="rect">
             <a:avLst/>
@@ -26894,7 +27020,7 @@
             <a:r>
               <a:rPr sz="2700" b="1" i="0">
                 <a:solidFill>
-                  <a:srgbClr val="1E2A38"/>
+                  <a:srgbClr val="294A48"/>
                 </a:solidFill>
                 <a:latin typeface="Calibri"/>
               </a:rPr>
@@ -26918,7 +27044,7 @@
             <a:avLst/>
           </a:prstGeom>
           <a:solidFill>
-            <a:srgbClr val="3B82F6"/>
+            <a:srgbClr val="D84830"/>
           </a:solidFill>
           <a:ln>
             <a:noFill/>
@@ -26963,8 +27089,8 @@
         </p:blipFill>
         <p:spPr>
           <a:xfrm>
-            <a:off x="11057839" y="365760"/>
-            <a:ext cx="475488" cy="475488"/>
+            <a:off x="10344607" y="384048"/>
+            <a:ext cx="1188720" cy="455933"/>
           </a:xfrm>
           <a:prstGeom prst="rect">
             <a:avLst/>
@@ -26980,7 +27106,7 @@
         <p:spPr>
           <a:xfrm>
             <a:off x="658368" y="6455664"/>
-            <a:ext cx="5486400" cy="219456"/>
+            <a:ext cx="6400800" cy="219456"/>
           </a:xfrm>
           <a:prstGeom prst="rect">
             <a:avLst/>
@@ -27005,7 +27131,7 @@
                 </a:solidFill>
                 <a:latin typeface="Calibri"/>
               </a:rPr>
-              <a:t>PrepPilot  ·  Vidya University  ·  Dept. of Computer Science &amp; Engineering</a:t>
+              <a:t>PrepPilot  ·  Vidya University, Meerut  ·  Dept. of Computer Science &amp; Engineering</a:t>
             </a:r>
           </a:p>
         </p:txBody>
@@ -28777,7 +28903,7 @@
         <p:spPr>
           <a:xfrm>
             <a:off x="658368" y="420624"/>
-            <a:ext cx="9777679" cy="219456"/>
+            <a:ext cx="9411919" cy="219456"/>
           </a:xfrm>
           <a:prstGeom prst="rect">
             <a:avLst/>
@@ -28798,7 +28924,7 @@
             <a:r>
               <a:rPr sz="1050" b="1" i="0">
                 <a:solidFill>
-                  <a:srgbClr val="3B82F6"/>
+                  <a:srgbClr val="D84830"/>
                 </a:solidFill>
                 <a:latin typeface="Calibri"/>
               </a:rPr>
@@ -28816,7 +28942,7 @@
         <p:spPr>
           <a:xfrm>
             <a:off x="658368" y="640080"/>
-            <a:ext cx="9777679" cy="457200"/>
+            <a:ext cx="9411919" cy="457200"/>
           </a:xfrm>
           <a:prstGeom prst="rect">
             <a:avLst/>
@@ -28837,7 +28963,7 @@
             <a:r>
               <a:rPr sz="2700" b="1" i="0">
                 <a:solidFill>
-                  <a:srgbClr val="1E2A38"/>
+                  <a:srgbClr val="294A48"/>
                 </a:solidFill>
                 <a:latin typeface="Calibri"/>
               </a:rPr>
@@ -28861,7 +28987,7 @@
             <a:avLst/>
           </a:prstGeom>
           <a:solidFill>
-            <a:srgbClr val="3B82F6"/>
+            <a:srgbClr val="D84830"/>
           </a:solidFill>
           <a:ln>
             <a:noFill/>
@@ -28906,8 +29032,8 @@
         </p:blipFill>
         <p:spPr>
           <a:xfrm>
-            <a:off x="11057839" y="365760"/>
-            <a:ext cx="475488" cy="475488"/>
+            <a:off x="10344607" y="384048"/>
+            <a:ext cx="1188720" cy="455933"/>
           </a:xfrm>
           <a:prstGeom prst="rect">
             <a:avLst/>
@@ -28923,7 +29049,7 @@
         <p:spPr>
           <a:xfrm>
             <a:off x="658368" y="6455664"/>
-            <a:ext cx="5486400" cy="219456"/>
+            <a:ext cx="6400800" cy="219456"/>
           </a:xfrm>
           <a:prstGeom prst="rect">
             <a:avLst/>
@@ -28948,7 +29074,7 @@
                 </a:solidFill>
                 <a:latin typeface="Calibri"/>
               </a:rPr>
-              <a:t>PrepPilot  ·  Vidya University  ·  Dept. of Computer Science &amp; Engineering</a:t>
+              <a:t>PrepPilot  ·  Vidya University, Meerut  ·  Dept. of Computer Science &amp; Engineering</a:t>
             </a:r>
           </a:p>
         </p:txBody>
@@ -29490,7 +29616,7 @@
         <p:spPr>
           <a:xfrm>
             <a:off x="658368" y="420624"/>
-            <a:ext cx="9777679" cy="219456"/>
+            <a:ext cx="9411919" cy="219456"/>
           </a:xfrm>
           <a:prstGeom prst="rect">
             <a:avLst/>
@@ -29511,7 +29637,7 @@
             <a:r>
               <a:rPr sz="1050" b="1" i="0">
                 <a:solidFill>
-                  <a:srgbClr val="3B82F6"/>
+                  <a:srgbClr val="D84830"/>
                 </a:solidFill>
                 <a:latin typeface="Calibri"/>
               </a:rPr>
@@ -29529,7 +29655,7 @@
         <p:spPr>
           <a:xfrm>
             <a:off x="658368" y="640080"/>
-            <a:ext cx="9777679" cy="457200"/>
+            <a:ext cx="9411919" cy="457200"/>
           </a:xfrm>
           <a:prstGeom prst="rect">
             <a:avLst/>
@@ -29550,7 +29676,7 @@
             <a:r>
               <a:rPr sz="2700" b="1" i="0">
                 <a:solidFill>
-                  <a:srgbClr val="1E2A38"/>
+                  <a:srgbClr val="294A48"/>
                 </a:solidFill>
                 <a:latin typeface="Calibri"/>
               </a:rPr>
@@ -29574,7 +29700,7 @@
             <a:avLst/>
           </a:prstGeom>
           <a:solidFill>
-            <a:srgbClr val="3B82F6"/>
+            <a:srgbClr val="D84830"/>
           </a:solidFill>
           <a:ln>
             <a:noFill/>
@@ -29619,8 +29745,8 @@
         </p:blipFill>
         <p:spPr>
           <a:xfrm>
-            <a:off x="11057839" y="365760"/>
-            <a:ext cx="475488" cy="475488"/>
+            <a:off x="10344607" y="384048"/>
+            <a:ext cx="1188720" cy="455933"/>
           </a:xfrm>
           <a:prstGeom prst="rect">
             <a:avLst/>
@@ -29636,7 +29762,7 @@
         <p:spPr>
           <a:xfrm>
             <a:off x="658368" y="6455664"/>
-            <a:ext cx="5486400" cy="219456"/>
+            <a:ext cx="6400800" cy="219456"/>
           </a:xfrm>
           <a:prstGeom prst="rect">
             <a:avLst/>
@@ -29661,7 +29787,7 @@
                 </a:solidFill>
                 <a:latin typeface="Calibri"/>
               </a:rPr>
-              <a:t>PrepPilot  ·  Vidya University  ·  Dept. of Computer Science &amp; Engineering</a:t>
+              <a:t>PrepPilot  ·  Vidya University, Meerut  ·  Dept. of Computer Science &amp; Engineering</a:t>
             </a:r>
           </a:p>
         </p:txBody>
@@ -31239,7 +31365,7 @@
         <p:spPr>
           <a:xfrm>
             <a:off x="658368" y="420624"/>
-            <a:ext cx="9777679" cy="219456"/>
+            <a:ext cx="9411919" cy="219456"/>
           </a:xfrm>
           <a:prstGeom prst="rect">
             <a:avLst/>
@@ -31260,7 +31386,7 @@
             <a:r>
               <a:rPr sz="1050" b="1" i="0">
                 <a:solidFill>
-                  <a:srgbClr val="3B82F6"/>
+                  <a:srgbClr val="D84830"/>
                 </a:solidFill>
                 <a:latin typeface="Calibri"/>
               </a:rPr>
@@ -31278,7 +31404,7 @@
         <p:spPr>
           <a:xfrm>
             <a:off x="658368" y="640080"/>
-            <a:ext cx="9777679" cy="457200"/>
+            <a:ext cx="9411919" cy="457200"/>
           </a:xfrm>
           <a:prstGeom prst="rect">
             <a:avLst/>
@@ -31299,7 +31425,7 @@
             <a:r>
               <a:rPr sz="2700" b="1" i="0">
                 <a:solidFill>
-                  <a:srgbClr val="1E2A38"/>
+                  <a:srgbClr val="294A48"/>
                 </a:solidFill>
                 <a:latin typeface="Calibri"/>
               </a:rPr>
@@ -31323,7 +31449,7 @@
             <a:avLst/>
           </a:prstGeom>
           <a:solidFill>
-            <a:srgbClr val="3B82F6"/>
+            <a:srgbClr val="D84830"/>
           </a:solidFill>
           <a:ln>
             <a:noFill/>
@@ -31368,8 +31494,8 @@
         </p:blipFill>
         <p:spPr>
           <a:xfrm>
-            <a:off x="11057839" y="365760"/>
-            <a:ext cx="475488" cy="475488"/>
+            <a:off x="10344607" y="384048"/>
+            <a:ext cx="1188720" cy="455933"/>
           </a:xfrm>
           <a:prstGeom prst="rect">
             <a:avLst/>
@@ -31385,7 +31511,7 @@
         <p:spPr>
           <a:xfrm>
             <a:off x="658368" y="6455664"/>
-            <a:ext cx="5486400" cy="219456"/>
+            <a:ext cx="6400800" cy="219456"/>
           </a:xfrm>
           <a:prstGeom prst="rect">
             <a:avLst/>
@@ -31410,7 +31536,7 @@
                 </a:solidFill>
                 <a:latin typeface="Calibri"/>
               </a:rPr>
-              <a:t>PrepPilot  ·  Vidya University  ·  Dept. of Computer Science &amp; Engineering</a:t>
+              <a:t>PrepPilot  ·  Vidya University, Meerut  ·  Dept. of Computer Science &amp; Engineering</a:t>
             </a:r>
           </a:p>
         </p:txBody>
@@ -32854,7 +32980,7 @@
             </a:avLst>
           </a:prstGeom>
           <a:solidFill>
-            <a:srgbClr val="1E2A38"/>
+            <a:srgbClr val="294A48"/>
           </a:solidFill>
           <a:ln>
             <a:noFill/>
@@ -32955,7 +33081,7 @@
         <p:spPr>
           <a:xfrm>
             <a:off x="658368" y="420624"/>
-            <a:ext cx="9777679" cy="219456"/>
+            <a:ext cx="9411919" cy="219456"/>
           </a:xfrm>
           <a:prstGeom prst="rect">
             <a:avLst/>
@@ -32976,7 +33102,7 @@
             <a:r>
               <a:rPr sz="1050" b="1" i="0">
                 <a:solidFill>
-                  <a:srgbClr val="3B82F6"/>
+                  <a:srgbClr val="D84830"/>
                 </a:solidFill>
                 <a:latin typeface="Calibri"/>
               </a:rPr>
@@ -32994,7 +33120,7 @@
         <p:spPr>
           <a:xfrm>
             <a:off x="658368" y="640080"/>
-            <a:ext cx="9777679" cy="457200"/>
+            <a:ext cx="9411919" cy="457200"/>
           </a:xfrm>
           <a:prstGeom prst="rect">
             <a:avLst/>
@@ -33015,7 +33141,7 @@
             <a:r>
               <a:rPr sz="2700" b="1" i="0">
                 <a:solidFill>
-                  <a:srgbClr val="1E2A38"/>
+                  <a:srgbClr val="294A48"/>
                 </a:solidFill>
                 <a:latin typeface="Calibri"/>
               </a:rPr>
@@ -33039,7 +33165,7 @@
             <a:avLst/>
           </a:prstGeom>
           <a:solidFill>
-            <a:srgbClr val="3B82F6"/>
+            <a:srgbClr val="D84830"/>
           </a:solidFill>
           <a:ln>
             <a:noFill/>
@@ -33084,8 +33210,8 @@
         </p:blipFill>
         <p:spPr>
           <a:xfrm>
-            <a:off x="11057839" y="365760"/>
-            <a:ext cx="475488" cy="475488"/>
+            <a:off x="10344607" y="384048"/>
+            <a:ext cx="1188720" cy="455933"/>
           </a:xfrm>
           <a:prstGeom prst="rect">
             <a:avLst/>
@@ -33101,7 +33227,7 @@
         <p:spPr>
           <a:xfrm>
             <a:off x="658368" y="6455664"/>
-            <a:ext cx="5486400" cy="219456"/>
+            <a:ext cx="6400800" cy="219456"/>
           </a:xfrm>
           <a:prstGeom prst="rect">
             <a:avLst/>
@@ -33126,7 +33252,7 @@
                 </a:solidFill>
                 <a:latin typeface="Calibri"/>
               </a:rPr>
-              <a:t>PrepPilot  ·  Vidya University  ·  Dept. of Computer Science &amp; Engineering</a:t>
+              <a:t>PrepPilot  ·  Vidya University, Meerut  ·  Dept. of Computer Science &amp; Engineering</a:t>
             </a:r>
           </a:p>
         </p:txBody>
@@ -34394,7 +34520,7 @@
         <p:spPr>
           <a:xfrm>
             <a:off x="658368" y="420624"/>
-            <a:ext cx="9777679" cy="219456"/>
+            <a:ext cx="9411919" cy="219456"/>
           </a:xfrm>
           <a:prstGeom prst="rect">
             <a:avLst/>
@@ -34415,7 +34541,7 @@
             <a:r>
               <a:rPr sz="1050" b="1" i="0">
                 <a:solidFill>
-                  <a:srgbClr val="3B82F6"/>
+                  <a:srgbClr val="D84830"/>
                 </a:solidFill>
                 <a:latin typeface="Calibri"/>
               </a:rPr>
@@ -34433,7 +34559,7 @@
         <p:spPr>
           <a:xfrm>
             <a:off x="658368" y="640080"/>
-            <a:ext cx="9777679" cy="457200"/>
+            <a:ext cx="9411919" cy="457200"/>
           </a:xfrm>
           <a:prstGeom prst="rect">
             <a:avLst/>
@@ -34454,7 +34580,7 @@
             <a:r>
               <a:rPr sz="2700" b="1" i="0">
                 <a:solidFill>
-                  <a:srgbClr val="1E2A38"/>
+                  <a:srgbClr val="294A48"/>
                 </a:solidFill>
                 <a:latin typeface="Calibri"/>
               </a:rPr>
@@ -34478,7 +34604,7 @@
             <a:avLst/>
           </a:prstGeom>
           <a:solidFill>
-            <a:srgbClr val="3B82F6"/>
+            <a:srgbClr val="D84830"/>
           </a:solidFill>
           <a:ln>
             <a:noFill/>
@@ -34523,8 +34649,8 @@
         </p:blipFill>
         <p:spPr>
           <a:xfrm>
-            <a:off x="11057839" y="365760"/>
-            <a:ext cx="475488" cy="475488"/>
+            <a:off x="10344607" y="384048"/>
+            <a:ext cx="1188720" cy="455933"/>
           </a:xfrm>
           <a:prstGeom prst="rect">
             <a:avLst/>
@@ -34540,7 +34666,7 @@
         <p:spPr>
           <a:xfrm>
             <a:off x="658368" y="6455664"/>
-            <a:ext cx="5486400" cy="219456"/>
+            <a:ext cx="6400800" cy="219456"/>
           </a:xfrm>
           <a:prstGeom prst="rect">
             <a:avLst/>
@@ -34565,7 +34691,7 @@
                 </a:solidFill>
                 <a:latin typeface="Calibri"/>
               </a:rPr>
-              <a:t>PrepPilot  ·  Vidya University  ·  Dept. of Computer Science &amp; Engineering</a:t>
+              <a:t>PrepPilot  ·  Vidya University, Meerut  ·  Dept. of Computer Science &amp; Engineering</a:t>
             </a:r>
           </a:p>
         </p:txBody>
@@ -35178,7 +35304,7 @@
             </a:avLst>
           </a:prstGeom>
           <a:solidFill>
-            <a:srgbClr val="1E2A38"/>
+            <a:srgbClr val="294A48"/>
           </a:solidFill>
           <a:ln>
             <a:noFill/>
@@ -35609,7 +35735,7 @@
     <p:bg>
       <p:bgPr>
         <a:solidFill>
-          <a:srgbClr val="0B0F14"/>
+          <a:srgbClr val="FFFFFF"/>
         </a:solidFill>
         <a:effectLst/>
       </p:bgPr>
@@ -35630,13 +35756,13 @@
         <p:spPr>
           <a:xfrm>
             <a:off x="0" y="0"/>
-            <a:ext cx="12191695" cy="91440"/>
+            <a:ext cx="310896" cy="6858000"/>
           </a:xfrm>
           <a:prstGeom prst="rect">
             <a:avLst/>
           </a:prstGeom>
           <a:solidFill>
-            <a:srgbClr val="3B82F6"/>
+            <a:srgbClr val="D84830"/>
           </a:solidFill>
           <a:ln>
             <a:noFill/>
@@ -35665,9 +35791,53 @@
           </a:p>
         </p:txBody>
       </p:sp>
+      <p:sp>
+        <p:nvSpPr>
+          <p:cNvPr id="3" name="Rectangle 2"/>
+          <p:cNvSpPr/>
+          <p:nvPr/>
+        </p:nvSpPr>
+        <p:spPr>
+          <a:xfrm>
+            <a:off x="0" y="3771900"/>
+            <a:ext cx="310896" cy="3086100"/>
+          </a:xfrm>
+          <a:prstGeom prst="rect">
+            <a:avLst/>
+          </a:prstGeom>
+          <a:solidFill>
+            <a:srgbClr val="3C909C"/>
+          </a:solidFill>
+          <a:ln>
+            <a:noFill/>
+          </a:ln>
+          <a:effectLst/>
+        </p:spPr>
+        <p:style>
+          <a:lnRef idx="1">
+            <a:schemeClr val="accent1"/>
+          </a:lnRef>
+          <a:fillRef idx="3">
+            <a:schemeClr val="accent1"/>
+          </a:fillRef>
+          <a:effectRef idx="2">
+            <a:schemeClr val="accent1"/>
+          </a:effectRef>
+          <a:fontRef idx="minor">
+            <a:schemeClr val="lt1"/>
+          </a:fontRef>
+        </p:style>
+        <p:txBody>
+          <a:bodyPr rtlCol="0" anchor="ctr"/>
+          <a:lstStyle/>
+          <a:p>
+            <a:pPr algn="ctr"/>
+          </a:p>
+        </p:txBody>
+      </p:sp>
       <p:pic>
         <p:nvPicPr>
-          <p:cNvPr id="3" name="Picture 2" descr="vidya-university-logo.png"/>
+          <p:cNvPr id="4" name="Picture 3" descr="vidya-university-logo.png"/>
           <p:cNvPicPr>
             <a:picLocks noChangeAspect="1"/>
           </p:cNvPicPr>
@@ -35681,8 +35851,8 @@
         </p:blipFill>
         <p:spPr>
           <a:xfrm>
-            <a:off x="11057839" y="365760"/>
-            <a:ext cx="475488" cy="475488"/>
+            <a:off x="10344607" y="384048"/>
+            <a:ext cx="1188720" cy="455933"/>
           </a:xfrm>
           <a:prstGeom prst="rect">
             <a:avLst/>
@@ -35691,7 +35861,7 @@
       </p:pic>
       <p:pic>
         <p:nvPicPr>
-          <p:cNvPr id="4" name="Picture 3" descr="preppilot-logo.png"/>
+          <p:cNvPr id="5" name="Picture 4" descr="preppilot-icon.png"/>
           <p:cNvPicPr>
             <a:picLocks noChangeAspect="1"/>
           </p:cNvPicPr>
@@ -35705,8 +35875,8 @@
         </p:blipFill>
         <p:spPr>
           <a:xfrm>
-            <a:off x="5528919" y="1572768"/>
-            <a:ext cx="1133856" cy="1133856"/>
+            <a:off x="5492343" y="1481328"/>
+            <a:ext cx="1207008" cy="1207008"/>
           </a:xfrm>
           <a:prstGeom prst="rect">
             <a:avLst/>
@@ -35715,7 +35885,7 @@
       </p:pic>
       <p:sp>
         <p:nvSpPr>
-          <p:cNvPr id="5" name="TextBox 4"/>
+          <p:cNvPr id="6" name="TextBox 5"/>
           <p:cNvSpPr txBox="1"/>
           <p:nvPr/>
         </p:nvSpPr>
@@ -35741,9 +35911,9 @@
               </a:lnSpc>
             </a:pPr>
             <a:r>
-              <a:rPr sz="4600" b="1" i="0">
-                <a:solidFill>
-                  <a:srgbClr val="FFFFFF"/>
+              <a:rPr sz="4400" b="1" i="0">
+                <a:solidFill>
+                  <a:srgbClr val="294A48"/>
                 </a:solidFill>
                 <a:latin typeface="Calibri"/>
               </a:rPr>
@@ -35754,13 +35924,57 @@
       </p:sp>
       <p:sp>
         <p:nvSpPr>
-          <p:cNvPr id="6" name="TextBox 5"/>
-          <p:cNvSpPr txBox="1"/>
-          <p:nvPr/>
-        </p:nvSpPr>
-        <p:spPr>
-          <a:xfrm>
-            <a:off x="0" y="3767328"/>
+          <p:cNvPr id="7" name="Rectangle 6"/>
+          <p:cNvSpPr/>
+          <p:nvPr/>
+        </p:nvSpPr>
+        <p:spPr>
+          <a:xfrm>
+            <a:off x="5766663" y="3749039"/>
+            <a:ext cx="658368" cy="45720"/>
+          </a:xfrm>
+          <a:prstGeom prst="rect">
+            <a:avLst/>
+          </a:prstGeom>
+          <a:solidFill>
+            <a:srgbClr val="D84830"/>
+          </a:solidFill>
+          <a:ln>
+            <a:noFill/>
+          </a:ln>
+          <a:effectLst/>
+        </p:spPr>
+        <p:style>
+          <a:lnRef idx="1">
+            <a:schemeClr val="accent1"/>
+          </a:lnRef>
+          <a:fillRef idx="3">
+            <a:schemeClr val="accent1"/>
+          </a:fillRef>
+          <a:effectRef idx="2">
+            <a:schemeClr val="accent1"/>
+          </a:effectRef>
+          <a:fontRef idx="minor">
+            <a:schemeClr val="lt1"/>
+          </a:fontRef>
+        </p:style>
+        <p:txBody>
+          <a:bodyPr rtlCol="0" anchor="ctr"/>
+          <a:lstStyle/>
+          <a:p>
+            <a:pPr algn="ctr"/>
+          </a:p>
+        </p:txBody>
+      </p:sp>
+      <p:sp>
+        <p:nvSpPr>
+          <p:cNvPr id="8" name="TextBox 7"/>
+          <p:cNvSpPr txBox="1"/>
+          <p:nvPr/>
+        </p:nvSpPr>
+        <p:spPr>
+          <a:xfrm>
+            <a:off x="0" y="3950208"/>
             <a:ext cx="12191695" cy="329184"/>
           </a:xfrm>
           <a:prstGeom prst="rect">
@@ -35782,7 +35996,7 @@
             <a:r>
               <a:rPr sz="1500" b="0" i="0">
                 <a:solidFill>
-                  <a:srgbClr val="9BA7B4"/>
+                  <a:srgbClr val="4A5568"/>
                 </a:solidFill>
                 <a:latin typeface="Calibri"/>
               </a:rPr>
@@ -35793,13 +36007,13 @@
       </p:sp>
       <p:sp>
         <p:nvSpPr>
-          <p:cNvPr id="7" name="TextBox 6"/>
-          <p:cNvSpPr txBox="1"/>
-          <p:nvPr/>
-        </p:nvSpPr>
-        <p:spPr>
-          <a:xfrm>
-            <a:off x="0" y="4626864"/>
+          <p:cNvPr id="9" name="TextBox 8"/>
+          <p:cNvSpPr txBox="1"/>
+          <p:nvPr/>
+        </p:nvSpPr>
+        <p:spPr>
+          <a:xfrm>
+            <a:off x="0" y="4700016"/>
             <a:ext cx="12191695" cy="274320"/>
           </a:xfrm>
           <a:prstGeom prst="rect">
@@ -35819,9 +36033,9 @@
               </a:lnSpc>
             </a:pPr>
             <a:r>
-              <a:rPr sz="1300" b="0" i="0">
-                <a:solidFill>
-                  <a:srgbClr val="FFFFFF"/>
+              <a:rPr sz="1300" b="1" i="0">
+                <a:solidFill>
+                  <a:srgbClr val="0B0F14"/>
                 </a:solidFill>
                 <a:latin typeface="Calibri"/>
               </a:rPr>
@@ -35832,13 +36046,13 @@
       </p:sp>
       <p:sp>
         <p:nvSpPr>
-          <p:cNvPr id="8" name="TextBox 7"/>
-          <p:cNvSpPr txBox="1"/>
-          <p:nvPr/>
-        </p:nvSpPr>
-        <p:spPr>
-          <a:xfrm>
-            <a:off x="0" y="4956048"/>
+          <p:cNvPr id="10" name="TextBox 9"/>
+          <p:cNvSpPr txBox="1"/>
+          <p:nvPr/>
+        </p:nvSpPr>
+        <p:spPr>
+          <a:xfrm>
+            <a:off x="0" y="5010912"/>
             <a:ext cx="12191695" cy="274320"/>
           </a:xfrm>
           <a:prstGeom prst="rect">
@@ -35860,7 +36074,7 @@
             <a:r>
               <a:rPr sz="1150" b="0" i="0">
                 <a:solidFill>
-                  <a:srgbClr val="6B7684"/>
+                  <a:srgbClr val="4A5568"/>
                 </a:solidFill>
                 <a:latin typeface="Calibri"/>
               </a:rPr>
@@ -35871,7 +36085,7 @@
       </p:sp>
       <p:sp>
         <p:nvSpPr>
-          <p:cNvPr id="9" name="TextBox 8"/>
+          <p:cNvPr id="11" name="TextBox 10"/>
           <p:cNvSpPr txBox="1"/>
           <p:nvPr/>
         </p:nvSpPr>
@@ -35903,14 +36117,53 @@
                 </a:solidFill>
                 <a:latin typeface="Calibri"/>
               </a:rPr>
-              <a:t>Department of Computer Science &amp; Engineering  ·  Vidya University  ·  12 September 2026</a:t>
-            </a:r>
-          </a:p>
-        </p:txBody>
-      </p:sp>
-      <p:sp>
-        <p:nvSpPr>
-          <p:cNvPr id="10" name="TextBox 9"/>
+              <a:t>Department of Computer Science &amp; Engineering  ·  Vidya University, Meerut</a:t>
+            </a:r>
+          </a:p>
+        </p:txBody>
+      </p:sp>
+      <p:sp>
+        <p:nvSpPr>
+          <p:cNvPr id="12" name="TextBox 11"/>
+          <p:cNvSpPr txBox="1"/>
+          <p:nvPr/>
+        </p:nvSpPr>
+        <p:spPr>
+          <a:xfrm>
+            <a:off x="0" y="5760720"/>
+            <a:ext cx="12191695" cy="274320"/>
+          </a:xfrm>
+          <a:prstGeom prst="rect">
+            <a:avLst/>
+          </a:prstGeom>
+          <a:noFill/>
+        </p:spPr>
+        <p:txBody>
+          <a:bodyPr wrap="square" lIns="0" rIns="0" tIns="0" bIns="0" anchor="t">
+            <a:spAutoFit/>
+          </a:bodyPr>
+          <a:lstStyle/>
+          <a:p>
+            <a:pPr algn="ctr">
+              <a:lnSpc>
+                <a:spcPct val="100000"/>
+              </a:lnSpc>
+            </a:pPr>
+            <a:r>
+              <a:rPr sz="1000" b="0" i="0">
+                <a:solidFill>
+                  <a:srgbClr val="6B7684"/>
+                </a:solidFill>
+                <a:latin typeface="Calibri"/>
+              </a:rPr>
+              <a:t>12 September 2026</a:t>
+            </a:r>
+          </a:p>
+        </p:txBody>
+      </p:sp>
+      <p:sp>
+        <p:nvSpPr>
+          <p:cNvPr id="13" name="TextBox 12"/>
           <p:cNvSpPr txBox="1"/>
           <p:nvPr/>
         </p:nvSpPr>
@@ -35949,7 +36202,7 @@
       </p:sp>
       <p:sp>
         <p:nvSpPr>
-          <p:cNvPr id="11" name="TextBox 10"/>
+          <p:cNvPr id="14" name="TextBox 13"/>
           <p:cNvSpPr txBox="1"/>
           <p:nvPr/>
         </p:nvSpPr>
@@ -36021,7 +36274,7 @@
         <p:spPr>
           <a:xfrm>
             <a:off x="658368" y="420624"/>
-            <a:ext cx="9777679" cy="219456"/>
+            <a:ext cx="9411919" cy="219456"/>
           </a:xfrm>
           <a:prstGeom prst="rect">
             <a:avLst/>
@@ -36042,7 +36295,7 @@
             <a:r>
               <a:rPr sz="1050" b="1" i="0">
                 <a:solidFill>
-                  <a:srgbClr val="3B82F6"/>
+                  <a:srgbClr val="D84830"/>
                 </a:solidFill>
                 <a:latin typeface="Calibri"/>
               </a:rPr>
@@ -36060,7 +36313,7 @@
         <p:spPr>
           <a:xfrm>
             <a:off x="658368" y="640080"/>
-            <a:ext cx="9777679" cy="457200"/>
+            <a:ext cx="9411919" cy="457200"/>
           </a:xfrm>
           <a:prstGeom prst="rect">
             <a:avLst/>
@@ -36081,7 +36334,7 @@
             <a:r>
               <a:rPr sz="2700" b="1" i="0">
                 <a:solidFill>
-                  <a:srgbClr val="1E2A38"/>
+                  <a:srgbClr val="294A48"/>
                 </a:solidFill>
                 <a:latin typeface="Calibri"/>
               </a:rPr>
@@ -36105,7 +36358,7 @@
             <a:avLst/>
           </a:prstGeom>
           <a:solidFill>
-            <a:srgbClr val="3B82F6"/>
+            <a:srgbClr val="D84830"/>
           </a:solidFill>
           <a:ln>
             <a:noFill/>
@@ -36150,8 +36403,8 @@
         </p:blipFill>
         <p:spPr>
           <a:xfrm>
-            <a:off x="11057839" y="365760"/>
-            <a:ext cx="475488" cy="475488"/>
+            <a:off x="10344607" y="384048"/>
+            <a:ext cx="1188720" cy="455933"/>
           </a:xfrm>
           <a:prstGeom prst="rect">
             <a:avLst/>
@@ -36167,7 +36420,7 @@
         <p:spPr>
           <a:xfrm>
             <a:off x="658368" y="6455664"/>
-            <a:ext cx="5486400" cy="219456"/>
+            <a:ext cx="6400800" cy="219456"/>
           </a:xfrm>
           <a:prstGeom prst="rect">
             <a:avLst/>
@@ -36192,7 +36445,7 @@
                 </a:solidFill>
                 <a:latin typeface="Calibri"/>
               </a:rPr>
-              <a:t>PrepPilot  ·  Vidya University  ·  Dept. of Computer Science &amp; Engineering</a:t>
+              <a:t>PrepPilot  ·  Vidya University, Meerut  ·  Dept. of Computer Science &amp; Engineering</a:t>
             </a:r>
           </a:p>
         </p:txBody>
@@ -37010,7 +37263,7 @@
         <p:spPr>
           <a:xfrm>
             <a:off x="658368" y="420624"/>
-            <a:ext cx="9777679" cy="219456"/>
+            <a:ext cx="9411919" cy="219456"/>
           </a:xfrm>
           <a:prstGeom prst="rect">
             <a:avLst/>
@@ -37031,7 +37284,7 @@
             <a:r>
               <a:rPr sz="1050" b="1" i="0">
                 <a:solidFill>
-                  <a:srgbClr val="3B82F6"/>
+                  <a:srgbClr val="D84830"/>
                 </a:solidFill>
                 <a:latin typeface="Calibri"/>
               </a:rPr>
@@ -37049,7 +37302,7 @@
         <p:spPr>
           <a:xfrm>
             <a:off x="658368" y="640080"/>
-            <a:ext cx="9777679" cy="457200"/>
+            <a:ext cx="9411919" cy="457200"/>
           </a:xfrm>
           <a:prstGeom prst="rect">
             <a:avLst/>
@@ -37070,7 +37323,7 @@
             <a:r>
               <a:rPr sz="2700" b="1" i="0">
                 <a:solidFill>
-                  <a:srgbClr val="1E2A38"/>
+                  <a:srgbClr val="294A48"/>
                 </a:solidFill>
                 <a:latin typeface="Calibri"/>
               </a:rPr>
@@ -37094,7 +37347,7 @@
             <a:avLst/>
           </a:prstGeom>
           <a:solidFill>
-            <a:srgbClr val="3B82F6"/>
+            <a:srgbClr val="D84830"/>
           </a:solidFill>
           <a:ln>
             <a:noFill/>
@@ -37139,8 +37392,8 @@
         </p:blipFill>
         <p:spPr>
           <a:xfrm>
-            <a:off x="11057839" y="365760"/>
-            <a:ext cx="475488" cy="475488"/>
+            <a:off x="10344607" y="384048"/>
+            <a:ext cx="1188720" cy="455933"/>
           </a:xfrm>
           <a:prstGeom prst="rect">
             <a:avLst/>
@@ -37156,7 +37409,7 @@
         <p:spPr>
           <a:xfrm>
             <a:off x="658368" y="6455664"/>
-            <a:ext cx="5486400" cy="219456"/>
+            <a:ext cx="6400800" cy="219456"/>
           </a:xfrm>
           <a:prstGeom prst="rect">
             <a:avLst/>
@@ -37181,7 +37434,7 @@
                 </a:solidFill>
                 <a:latin typeface="Calibri"/>
               </a:rPr>
-              <a:t>PrepPilot  ·  Vidya University  ·  Dept. of Computer Science &amp; Engineering</a:t>
+              <a:t>PrepPilot  ·  Vidya University, Meerut  ·  Dept. of Computer Science &amp; Engineering</a:t>
             </a:r>
           </a:p>
         </p:txBody>
@@ -37242,7 +37495,7 @@
             </a:avLst>
           </a:prstGeom>
           <a:solidFill>
-            <a:srgbClr val="1E2A38"/>
+            <a:srgbClr val="294A48"/>
           </a:solidFill>
           <a:ln>
             <a:noFill/>
@@ -38027,7 +38280,7 @@
         <p:spPr>
           <a:xfrm>
             <a:off x="658368" y="420624"/>
-            <a:ext cx="9777679" cy="219456"/>
+            <a:ext cx="9411919" cy="219456"/>
           </a:xfrm>
           <a:prstGeom prst="rect">
             <a:avLst/>
@@ -38048,7 +38301,7 @@
             <a:r>
               <a:rPr sz="1050" b="1" i="0">
                 <a:solidFill>
-                  <a:srgbClr val="3B82F6"/>
+                  <a:srgbClr val="D84830"/>
                 </a:solidFill>
                 <a:latin typeface="Calibri"/>
               </a:rPr>
@@ -38066,7 +38319,7 @@
         <p:spPr>
           <a:xfrm>
             <a:off x="658368" y="640080"/>
-            <a:ext cx="9777679" cy="457200"/>
+            <a:ext cx="9411919" cy="457200"/>
           </a:xfrm>
           <a:prstGeom prst="rect">
             <a:avLst/>
@@ -38087,7 +38340,7 @@
             <a:r>
               <a:rPr sz="2700" b="1" i="0">
                 <a:solidFill>
-                  <a:srgbClr val="1E2A38"/>
+                  <a:srgbClr val="294A48"/>
                 </a:solidFill>
                 <a:latin typeface="Calibri"/>
               </a:rPr>
@@ -38111,7 +38364,7 @@
             <a:avLst/>
           </a:prstGeom>
           <a:solidFill>
-            <a:srgbClr val="3B82F6"/>
+            <a:srgbClr val="D84830"/>
           </a:solidFill>
           <a:ln>
             <a:noFill/>
@@ -38156,8 +38409,8 @@
         </p:blipFill>
         <p:spPr>
           <a:xfrm>
-            <a:off x="11057839" y="365760"/>
-            <a:ext cx="475488" cy="475488"/>
+            <a:off x="10344607" y="384048"/>
+            <a:ext cx="1188720" cy="455933"/>
           </a:xfrm>
           <a:prstGeom prst="rect">
             <a:avLst/>
@@ -38173,7 +38426,7 @@
         <p:spPr>
           <a:xfrm>
             <a:off x="658368" y="6455664"/>
-            <a:ext cx="5486400" cy="219456"/>
+            <a:ext cx="6400800" cy="219456"/>
           </a:xfrm>
           <a:prstGeom prst="rect">
             <a:avLst/>
@@ -38198,7 +38451,7 @@
                 </a:solidFill>
                 <a:latin typeface="Calibri"/>
               </a:rPr>
-              <a:t>PrepPilot  ·  Vidya University  ·  Dept. of Computer Science &amp; Engineering</a:t>
+              <a:t>PrepPilot  ·  Vidya University, Meerut  ·  Dept. of Computer Science &amp; Engineering</a:t>
             </a:r>
           </a:p>
         </p:txBody>
@@ -38726,7 +38979,7 @@
         <p:spPr>
           <a:xfrm>
             <a:off x="658368" y="4261104"/>
-            <a:ext cx="10874959" cy="1335024"/>
+            <a:ext cx="10874959" cy="1444752"/>
           </a:xfrm>
           <a:prstGeom prst="roundRect">
             <a:avLst>
@@ -38876,7 +39129,7 @@
         <p:spPr>
           <a:xfrm>
             <a:off x="658368" y="420624"/>
-            <a:ext cx="9777679" cy="219456"/>
+            <a:ext cx="9411919" cy="219456"/>
           </a:xfrm>
           <a:prstGeom prst="rect">
             <a:avLst/>
@@ -38897,7 +39150,7 @@
             <a:r>
               <a:rPr sz="1050" b="1" i="0">
                 <a:solidFill>
-                  <a:srgbClr val="3B82F6"/>
+                  <a:srgbClr val="D84830"/>
                 </a:solidFill>
                 <a:latin typeface="Calibri"/>
               </a:rPr>
@@ -38915,7 +39168,7 @@
         <p:spPr>
           <a:xfrm>
             <a:off x="658368" y="640080"/>
-            <a:ext cx="9777679" cy="457200"/>
+            <a:ext cx="9411919" cy="457200"/>
           </a:xfrm>
           <a:prstGeom prst="rect">
             <a:avLst/>
@@ -38936,7 +39189,7 @@
             <a:r>
               <a:rPr sz="2700" b="1" i="0">
                 <a:solidFill>
-                  <a:srgbClr val="1E2A38"/>
+                  <a:srgbClr val="294A48"/>
                 </a:solidFill>
                 <a:latin typeface="Calibri"/>
               </a:rPr>
@@ -38960,7 +39213,7 @@
             <a:avLst/>
           </a:prstGeom>
           <a:solidFill>
-            <a:srgbClr val="3B82F6"/>
+            <a:srgbClr val="D84830"/>
           </a:solidFill>
           <a:ln>
             <a:noFill/>
@@ -39005,8 +39258,8 @@
         </p:blipFill>
         <p:spPr>
           <a:xfrm>
-            <a:off x="11057839" y="365760"/>
-            <a:ext cx="475488" cy="475488"/>
+            <a:off x="10344607" y="384048"/>
+            <a:ext cx="1188720" cy="455933"/>
           </a:xfrm>
           <a:prstGeom prst="rect">
             <a:avLst/>
@@ -39022,7 +39275,7 @@
         <p:spPr>
           <a:xfrm>
             <a:off x="658368" y="6455664"/>
-            <a:ext cx="5486400" cy="219456"/>
+            <a:ext cx="6400800" cy="219456"/>
           </a:xfrm>
           <a:prstGeom prst="rect">
             <a:avLst/>
@@ -39047,7 +39300,7 @@
                 </a:solidFill>
                 <a:latin typeface="Calibri"/>
               </a:rPr>
-              <a:t>PrepPilot  ·  Vidya University  ·  Dept. of Computer Science &amp; Engineering</a:t>
+              <a:t>PrepPilot  ·  Vidya University, Meerut  ·  Dept. of Computer Science &amp; Engineering</a:t>
             </a:r>
           </a:p>
         </p:txBody>
@@ -40189,7 +40442,7 @@
         <p:spPr>
           <a:xfrm>
             <a:off x="658368" y="420624"/>
-            <a:ext cx="9777679" cy="219456"/>
+            <a:ext cx="9411919" cy="219456"/>
           </a:xfrm>
           <a:prstGeom prst="rect">
             <a:avLst/>
@@ -40210,7 +40463,7 @@
             <a:r>
               <a:rPr sz="1050" b="1" i="0">
                 <a:solidFill>
-                  <a:srgbClr val="3B82F6"/>
+                  <a:srgbClr val="D84830"/>
                 </a:solidFill>
                 <a:latin typeface="Calibri"/>
               </a:rPr>
@@ -40228,7 +40481,7 @@
         <p:spPr>
           <a:xfrm>
             <a:off x="658368" y="640080"/>
-            <a:ext cx="9777679" cy="457200"/>
+            <a:ext cx="9411919" cy="457200"/>
           </a:xfrm>
           <a:prstGeom prst="rect">
             <a:avLst/>
@@ -40249,7 +40502,7 @@
             <a:r>
               <a:rPr sz="2700" b="1" i="0">
                 <a:solidFill>
-                  <a:srgbClr val="1E2A38"/>
+                  <a:srgbClr val="294A48"/>
                 </a:solidFill>
                 <a:latin typeface="Calibri"/>
               </a:rPr>
@@ -40273,7 +40526,7 @@
             <a:avLst/>
           </a:prstGeom>
           <a:solidFill>
-            <a:srgbClr val="3B82F6"/>
+            <a:srgbClr val="D84830"/>
           </a:solidFill>
           <a:ln>
             <a:noFill/>
@@ -40318,8 +40571,8 @@
         </p:blipFill>
         <p:spPr>
           <a:xfrm>
-            <a:off x="11057839" y="365760"/>
-            <a:ext cx="475488" cy="475488"/>
+            <a:off x="10344607" y="384048"/>
+            <a:ext cx="1188720" cy="455933"/>
           </a:xfrm>
           <a:prstGeom prst="rect">
             <a:avLst/>
@@ -40335,7 +40588,7 @@
         <p:spPr>
           <a:xfrm>
             <a:off x="658368" y="6455664"/>
-            <a:ext cx="5486400" cy="219456"/>
+            <a:ext cx="6400800" cy="219456"/>
           </a:xfrm>
           <a:prstGeom prst="rect">
             <a:avLst/>
@@ -40360,7 +40613,7 @@
                 </a:solidFill>
                 <a:latin typeface="Calibri"/>
               </a:rPr>
-              <a:t>PrepPilot  ·  Vidya University  ·  Dept. of Computer Science &amp; Engineering</a:t>
+              <a:t>PrepPilot  ·  Vidya University, Meerut  ·  Dept. of Computer Science &amp; Engineering</a:t>
             </a:r>
           </a:p>
         </p:txBody>
@@ -41145,7 +41398,7 @@
             </a:avLst>
           </a:prstGeom>
           <a:solidFill>
-            <a:srgbClr val="1E2A38"/>
+            <a:srgbClr val="294A48"/>
           </a:solidFill>
           <a:ln>
             <a:noFill/>
@@ -41324,7 +41577,7 @@
         <p:spPr>
           <a:xfrm>
             <a:off x="658368" y="420624"/>
-            <a:ext cx="9777679" cy="219456"/>
+            <a:ext cx="9411919" cy="219456"/>
           </a:xfrm>
           <a:prstGeom prst="rect">
             <a:avLst/>
@@ -41345,7 +41598,7 @@
             <a:r>
               <a:rPr sz="1050" b="1" i="0">
                 <a:solidFill>
-                  <a:srgbClr val="3B82F6"/>
+                  <a:srgbClr val="D84830"/>
                 </a:solidFill>
                 <a:latin typeface="Calibri"/>
               </a:rPr>
@@ -41363,7 +41616,7 @@
         <p:spPr>
           <a:xfrm>
             <a:off x="658368" y="640080"/>
-            <a:ext cx="9777679" cy="457200"/>
+            <a:ext cx="9411919" cy="457200"/>
           </a:xfrm>
           <a:prstGeom prst="rect">
             <a:avLst/>
@@ -41384,7 +41637,7 @@
             <a:r>
               <a:rPr sz="2700" b="1" i="0">
                 <a:solidFill>
-                  <a:srgbClr val="1E2A38"/>
+                  <a:srgbClr val="294A48"/>
                 </a:solidFill>
                 <a:latin typeface="Calibri"/>
               </a:rPr>
@@ -41408,7 +41661,7 @@
             <a:avLst/>
           </a:prstGeom>
           <a:solidFill>
-            <a:srgbClr val="3B82F6"/>
+            <a:srgbClr val="D84830"/>
           </a:solidFill>
           <a:ln>
             <a:noFill/>
@@ -41453,8 +41706,8 @@
         </p:blipFill>
         <p:spPr>
           <a:xfrm>
-            <a:off x="11057839" y="365760"/>
-            <a:ext cx="475488" cy="475488"/>
+            <a:off x="10344607" y="384048"/>
+            <a:ext cx="1188720" cy="455933"/>
           </a:xfrm>
           <a:prstGeom prst="rect">
             <a:avLst/>
@@ -41470,7 +41723,7 @@
         <p:spPr>
           <a:xfrm>
             <a:off x="658368" y="6455664"/>
-            <a:ext cx="5486400" cy="219456"/>
+            <a:ext cx="6400800" cy="219456"/>
           </a:xfrm>
           <a:prstGeom prst="rect">
             <a:avLst/>
@@ -41495,7 +41748,7 @@
                 </a:solidFill>
                 <a:latin typeface="Calibri"/>
               </a:rPr>
-              <a:t>PrepPilot  ·  Vidya University  ·  Dept. of Computer Science &amp; Engineering</a:t>
+              <a:t>PrepPilot  ·  Vidya University, Meerut  ·  Dept. of Computer Science &amp; Engineering</a:t>
             </a:r>
           </a:p>
         </p:txBody>
@@ -43433,7 +43686,7 @@
         <p:spPr>
           <a:xfrm>
             <a:off x="658368" y="420624"/>
-            <a:ext cx="9777679" cy="219456"/>
+            <a:ext cx="9411919" cy="219456"/>
           </a:xfrm>
           <a:prstGeom prst="rect">
             <a:avLst/>
@@ -43454,7 +43707,7 @@
             <a:r>
               <a:rPr sz="1050" b="1" i="0">
                 <a:solidFill>
-                  <a:srgbClr val="3B82F6"/>
+                  <a:srgbClr val="D84830"/>
                 </a:solidFill>
                 <a:latin typeface="Calibri"/>
               </a:rPr>
@@ -43472,7 +43725,7 @@
         <p:spPr>
           <a:xfrm>
             <a:off x="658368" y="640080"/>
-            <a:ext cx="9777679" cy="457200"/>
+            <a:ext cx="9411919" cy="457200"/>
           </a:xfrm>
           <a:prstGeom prst="rect">
             <a:avLst/>
@@ -43493,7 +43746,7 @@
             <a:r>
               <a:rPr sz="2700" b="1" i="0">
                 <a:solidFill>
-                  <a:srgbClr val="1E2A38"/>
+                  <a:srgbClr val="294A48"/>
                 </a:solidFill>
                 <a:latin typeface="Calibri"/>
               </a:rPr>
@@ -43517,7 +43770,7 @@
             <a:avLst/>
           </a:prstGeom>
           <a:solidFill>
-            <a:srgbClr val="3B82F6"/>
+            <a:srgbClr val="D84830"/>
           </a:solidFill>
           <a:ln>
             <a:noFill/>
@@ -43562,8 +43815,8 @@
         </p:blipFill>
         <p:spPr>
           <a:xfrm>
-            <a:off x="11057839" y="365760"/>
-            <a:ext cx="475488" cy="475488"/>
+            <a:off x="10344607" y="384048"/>
+            <a:ext cx="1188720" cy="455933"/>
           </a:xfrm>
           <a:prstGeom prst="rect">
             <a:avLst/>
@@ -43579,7 +43832,7 @@
         <p:spPr>
           <a:xfrm>
             <a:off x="658368" y="6455664"/>
-            <a:ext cx="5486400" cy="219456"/>
+            <a:ext cx="6400800" cy="219456"/>
           </a:xfrm>
           <a:prstGeom prst="rect">
             <a:avLst/>
@@ -43604,7 +43857,7 @@
                 </a:solidFill>
                 <a:latin typeface="Calibri"/>
               </a:rPr>
-              <a:t>PrepPilot  ·  Vidya University  ·  Dept. of Computer Science &amp; Engineering</a:t>
+              <a:t>PrepPilot  ·  Vidya University, Meerut  ·  Dept. of Computer Science &amp; Engineering</a:t>
             </a:r>
           </a:p>
         </p:txBody>

--- a/docs/PrepPilot_First_Project_Presentation.pptx
+++ b/docs/PrepPilot_First_Project_Presentation.pptx
@@ -15633,7 +15633,7 @@
         <p:spPr>
           <a:xfrm>
             <a:off x="6565392" y="2395728"/>
-            <a:ext cx="4967935" cy="658368"/>
+            <a:ext cx="4967935" cy="749808"/>
           </a:xfrm>
           <a:prstGeom prst="roundRect">
             <a:avLst>
@@ -15762,7 +15762,7 @@
         <p:spPr>
           <a:xfrm>
             <a:off x="6784848" y="2962656"/>
-            <a:ext cx="4529023" cy="-73152"/>
+            <a:ext cx="4529023" cy="54864"/>
           </a:xfrm>
           <a:prstGeom prst="rect">
             <a:avLst/>
@@ -15803,8 +15803,8 @@
         </p:nvSpPr>
         <p:spPr>
           <a:xfrm>
-            <a:off x="6565392" y="3145536"/>
-            <a:ext cx="4967935" cy="658368"/>
+            <a:off x="6565392" y="3182112"/>
+            <a:ext cx="4967935" cy="749808"/>
           </a:xfrm>
           <a:prstGeom prst="roundRect">
             <a:avLst>
@@ -15849,7 +15849,7 @@
         </p:nvSpPr>
         <p:spPr>
           <a:xfrm>
-            <a:off x="6766559" y="3364991"/>
+            <a:off x="6766559" y="3401568"/>
             <a:ext cx="50292" cy="237744"/>
           </a:xfrm>
           <a:prstGeom prst="roundRect">
@@ -15893,7 +15893,7 @@
         </p:nvSpPr>
         <p:spPr>
           <a:xfrm>
-            <a:off x="6949440" y="3319272"/>
+            <a:off x="6949440" y="3355848"/>
             <a:ext cx="4401007" cy="292608"/>
           </a:xfrm>
           <a:prstGeom prst="rect">
@@ -15932,8 +15932,8 @@
         </p:nvSpPr>
         <p:spPr>
           <a:xfrm>
-            <a:off x="6784848" y="3712463"/>
-            <a:ext cx="4529023" cy="-73152"/>
+            <a:off x="6784848" y="3749039"/>
+            <a:ext cx="4529023" cy="54864"/>
           </a:xfrm>
           <a:prstGeom prst="rect">
             <a:avLst/>
@@ -15974,8 +15974,8 @@
         </p:nvSpPr>
         <p:spPr>
           <a:xfrm>
-            <a:off x="6565392" y="3895344"/>
-            <a:ext cx="4967935" cy="658368"/>
+            <a:off x="6565392" y="3968496"/>
+            <a:ext cx="4967935" cy="749808"/>
           </a:xfrm>
           <a:prstGeom prst="roundRect">
             <a:avLst>
@@ -16020,7 +16020,7 @@
         </p:nvSpPr>
         <p:spPr>
           <a:xfrm>
-            <a:off x="6766559" y="4114800"/>
+            <a:off x="6766559" y="4187952"/>
             <a:ext cx="50292" cy="237744"/>
           </a:xfrm>
           <a:prstGeom prst="roundRect">
@@ -16064,7 +16064,7 @@
         </p:nvSpPr>
         <p:spPr>
           <a:xfrm>
-            <a:off x="6949440" y="4069080"/>
+            <a:off x="6949440" y="4142232"/>
             <a:ext cx="4401007" cy="292608"/>
           </a:xfrm>
           <a:prstGeom prst="rect">
@@ -16103,8 +16103,8 @@
         </p:nvSpPr>
         <p:spPr>
           <a:xfrm>
-            <a:off x="6784848" y="4462272"/>
-            <a:ext cx="4529023" cy="-73152"/>
+            <a:off x="6784848" y="4535424"/>
+            <a:ext cx="4529023" cy="54864"/>
           </a:xfrm>
           <a:prstGeom prst="rect">
             <a:avLst/>
@@ -32981,7 +32981,7 @@
         <p:spPr>
           <a:xfrm>
             <a:off x="5111496" y="1956816"/>
-            <a:ext cx="6202375" cy="54863"/>
+            <a:ext cx="6202375" cy="54864"/>
           </a:xfrm>
           <a:prstGeom prst="rect">
             <a:avLst/>
@@ -33152,7 +33152,7 @@
         <p:spPr>
           <a:xfrm>
             <a:off x="5111496" y="2852928"/>
-            <a:ext cx="6202375" cy="54863"/>
+            <a:ext cx="6202375" cy="54864"/>
           </a:xfrm>
           <a:prstGeom prst="rect">
             <a:avLst/>
@@ -33323,7 +33323,7 @@
         <p:spPr>
           <a:xfrm>
             <a:off x="5111496" y="3749039"/>
-            <a:ext cx="6202375" cy="54863"/>
+            <a:ext cx="6202375" cy="54864"/>
           </a:xfrm>
           <a:prstGeom prst="rect">
             <a:avLst/>
@@ -33494,7 +33494,7 @@
         <p:spPr>
           <a:xfrm>
             <a:off x="5111496" y="4645152"/>
-            <a:ext cx="6202375" cy="54863"/>
+            <a:ext cx="6202375" cy="54864"/>
           </a:xfrm>
           <a:prstGeom prst="rect">
             <a:avLst/>

--- a/docs/PrepPilot_First_Project_Presentation.pptx
+++ b/docs/PrepPilot_First_Project_Presentation.pptx
@@ -591,7 +591,7 @@
           <a:lstStyle/>
           <a:p>
             <a:r>
-              <a:t>Three revision features, and the amber panel is the one we most expect to be questioned on. Many apps say 'spaced repetition' and mean SM-2, the Anki algorithm. We implemented SM-2 fully and tested it, but our review screen uses four fixed intervals instead, because fixed labels tell the student exactly what will happen. We maintain the SM-2 statistics underneath, so switching is a one-line change. On the right, the reminder limitation is platform-specific and stated in the app.</a:t>
+              <a:t>Three revision features, and the amber panel is the one we most expect to be questioned on. Many apps say 'spaced repetition' and mean SM-2, the Anki algorithm. We implemented SM-2 fully and tested it, but our review screen uses three fixed intervals instead, because fixed labels tell the student exactly what will happen. We maintain the SM-2 statistics underneath, so switching is a one-line change. On the right, the reminder limitation is platform-specific and stated in the app.</a:t>
             </a:r>
           </a:p>
         </p:txBody>
@@ -6285,7 +6285,7 @@
                 </a:solidFill>
                 <a:latin typeface="Calibri"/>
               </a:rPr>
-              <a:t>Cards are written against a topic. After seeing the answer the student picks one of four fixed intervals.</a:t>
+              <a:t>Cards are written against a topic. After seeing the answer the student picks one of three fixed intervals.</a:t>
             </a:r>
           </a:p>
         </p:txBody>
@@ -6299,61 +6299,6 @@
         <p:spPr>
           <a:xfrm>
             <a:off x="859536" y="2889504"/>
-            <a:ext cx="749808" cy="402336"/>
-          </a:xfrm>
-          <a:prstGeom prst="roundRect">
-            <a:avLst>
-              <a:gd name="adj" fmla="val 10000"/>
-            </a:avLst>
-          </a:prstGeom>
-          <a:solidFill>
-            <a:srgbClr val="EF4444"/>
-          </a:solidFill>
-          <a:ln>
-            <a:noFill/>
-          </a:ln>
-          <a:effectLst/>
-        </p:spPr>
-        <p:style>
-          <a:lnRef idx="1">
-            <a:schemeClr val="accent1"/>
-          </a:lnRef>
-          <a:fillRef idx="3">
-            <a:schemeClr val="accent1"/>
-          </a:fillRef>
-          <a:effectRef idx="2">
-            <a:schemeClr val="accent1"/>
-          </a:effectRef>
-          <a:fontRef idx="minor">
-            <a:schemeClr val="lt1"/>
-          </a:fontRef>
-        </p:style>
-        <p:txBody>
-          <a:bodyPr rtlCol="0" anchor="ctr" wrap="square" lIns="73152" rIns="73152" tIns="0" bIns="0"/>
-          <a:lstStyle/>
-          <a:p>
-            <a:pPr algn="ctr"/>
-            <a:r>
-              <a:rPr sz="1150" b="1">
-                <a:solidFill>
-                  <a:srgbClr val="FFFFFF"/>
-                </a:solidFill>
-                <a:latin typeface="Calibri"/>
-              </a:rPr>
-              <a:t>5m</a:t>
-            </a:r>
-          </a:p>
-        </p:txBody>
-      </p:sp>
-      <p:sp>
-        <p:nvSpPr>
-          <p:cNvPr id="13" name="Rounded Rectangle 12"/>
-          <p:cNvSpPr/>
-          <p:nvPr/>
-        </p:nvSpPr>
-        <p:spPr>
-          <a:xfrm>
-            <a:off x="1728216" y="2889504"/>
             <a:ext cx="749808" cy="402336"/>
           </a:xfrm>
           <a:prstGeom prst="roundRect">
@@ -6402,13 +6347,13 @@
       </p:sp>
       <p:sp>
         <p:nvSpPr>
-          <p:cNvPr id="14" name="Rounded Rectangle 13"/>
+          <p:cNvPr id="13" name="Rounded Rectangle 12"/>
           <p:cNvSpPr/>
           <p:nvPr/>
         </p:nvSpPr>
         <p:spPr>
           <a:xfrm>
-            <a:off x="2596896" y="2889504"/>
+            <a:off x="1728216" y="2889504"/>
             <a:ext cx="749808" cy="402336"/>
           </a:xfrm>
           <a:prstGeom prst="roundRect">
@@ -6457,13 +6402,13 @@
       </p:sp>
       <p:sp>
         <p:nvSpPr>
-          <p:cNvPr id="15" name="Rounded Rectangle 14"/>
+          <p:cNvPr id="14" name="Rounded Rectangle 13"/>
           <p:cNvSpPr/>
           <p:nvPr/>
         </p:nvSpPr>
         <p:spPr>
           <a:xfrm>
-            <a:off x="3465575" y="2889504"/>
+            <a:off x="2596896" y="2889504"/>
             <a:ext cx="749808" cy="402336"/>
           </a:xfrm>
           <a:prstGeom prst="roundRect">
@@ -6512,7 +6457,7 @@
       </p:sp>
       <p:sp>
         <p:nvSpPr>
-          <p:cNvPr id="16" name="Rounded Rectangle 15"/>
+          <p:cNvPr id="15" name="Rounded Rectangle 14"/>
           <p:cNvSpPr/>
           <p:nvPr/>
         </p:nvSpPr>
@@ -6558,7 +6503,7 @@
       </p:sp>
       <p:sp>
         <p:nvSpPr>
-          <p:cNvPr id="17" name="Rounded Rectangle 16"/>
+          <p:cNvPr id="16" name="Rounded Rectangle 15"/>
           <p:cNvSpPr/>
           <p:nvPr/>
         </p:nvSpPr>
@@ -6602,7 +6547,7 @@
       </p:sp>
       <p:sp>
         <p:nvSpPr>
-          <p:cNvPr id="18" name="TextBox 17"/>
+          <p:cNvPr id="17" name="TextBox 16"/>
           <p:cNvSpPr txBox="1"/>
           <p:nvPr/>
         </p:nvSpPr>
@@ -6641,7 +6586,7 @@
       </p:sp>
       <p:sp>
         <p:nvSpPr>
-          <p:cNvPr id="19" name="TextBox 18"/>
+          <p:cNvPr id="18" name="TextBox 17"/>
           <p:cNvSpPr txBox="1"/>
           <p:nvPr/>
         </p:nvSpPr>
@@ -6683,7 +6628,7 @@
       </p:sp>
       <p:sp>
         <p:nvSpPr>
-          <p:cNvPr id="20" name="Rounded Rectangle 19"/>
+          <p:cNvPr id="19" name="Rounded Rectangle 18"/>
           <p:cNvSpPr/>
           <p:nvPr/>
         </p:nvSpPr>
@@ -6729,7 +6674,7 @@
       </p:sp>
       <p:sp>
         <p:nvSpPr>
-          <p:cNvPr id="21" name="Rounded Rectangle 20"/>
+          <p:cNvPr id="20" name="Rounded Rectangle 19"/>
           <p:cNvSpPr/>
           <p:nvPr/>
         </p:nvSpPr>
@@ -6773,7 +6718,7 @@
       </p:sp>
       <p:sp>
         <p:nvSpPr>
-          <p:cNvPr id="22" name="TextBox 21"/>
+          <p:cNvPr id="21" name="TextBox 20"/>
           <p:cNvSpPr txBox="1"/>
           <p:nvPr/>
         </p:nvSpPr>
@@ -6812,7 +6757,7 @@
       </p:sp>
       <p:sp>
         <p:nvSpPr>
-          <p:cNvPr id="23" name="TextBox 22"/>
+          <p:cNvPr id="22" name="TextBox 21"/>
           <p:cNvSpPr txBox="1"/>
           <p:nvPr/>
         </p:nvSpPr>
@@ -6854,7 +6799,7 @@
       </p:sp>
       <p:sp>
         <p:nvSpPr>
-          <p:cNvPr id="24" name="Rounded Rectangle 23"/>
+          <p:cNvPr id="23" name="Rounded Rectangle 22"/>
           <p:cNvSpPr/>
           <p:nvPr/>
         </p:nvSpPr>
@@ -6900,7 +6845,7 @@
       </p:sp>
       <p:sp>
         <p:nvSpPr>
-          <p:cNvPr id="25" name="Rounded Rectangle 24"/>
+          <p:cNvPr id="24" name="Rounded Rectangle 23"/>
           <p:cNvSpPr/>
           <p:nvPr/>
         </p:nvSpPr>
@@ -6955,7 +6900,7 @@
       </p:sp>
       <p:sp>
         <p:nvSpPr>
-          <p:cNvPr id="26" name="TextBox 25"/>
+          <p:cNvPr id="25" name="TextBox 24"/>
           <p:cNvSpPr txBox="1"/>
           <p:nvPr/>
         </p:nvSpPr>
@@ -6994,7 +6939,7 @@
       </p:sp>
       <p:sp>
         <p:nvSpPr>
-          <p:cNvPr id="27" name="TextBox 26"/>
+          <p:cNvPr id="26" name="TextBox 25"/>
           <p:cNvSpPr txBox="1"/>
           <p:nvPr/>
         </p:nvSpPr>
@@ -7033,7 +6978,7 @@
       </p:sp>
       <p:sp>
         <p:nvSpPr>
-          <p:cNvPr id="28" name="TextBox 27"/>
+          <p:cNvPr id="27" name="TextBox 26"/>
           <p:cNvSpPr txBox="1"/>
           <p:nvPr/>
         </p:nvSpPr>
@@ -17025,7 +16970,7 @@
                 </a:solidFill>
                 <a:latin typeface="Calibri"/>
               </a:rPr>
-              <a:t>NativeWind</a:t>
+              <a:t>StyleSheet + tokens</a:t>
             </a:r>
           </a:p>
         </p:txBody>
@@ -18807,7 +18752,7 @@
                 </a:solidFill>
                 <a:latin typeface="Calibri"/>
               </a:rPr>
-              <a:t>1,799</a:t>
+              <a:t>1,934</a:t>
             </a:r>
           </a:p>
         </p:txBody>
@@ -18931,7 +18876,7 @@
                 </a:solidFill>
                 <a:latin typeface="Calibri"/>
               </a:rPr>
-              <a:t>80</a:t>
+              <a:t>91</a:t>
             </a:r>
           </a:p>
         </p:txBody>
@@ -19420,7 +19365,7 @@
                 </a:solidFill>
                 <a:latin typeface="Calibri"/>
               </a:rPr>
-              <a:t>512 tests</a:t>
+              <a:t>508 tests</a:t>
             </a:r>
           </a:p>
         </p:txBody>
@@ -19498,7 +19443,7 @@
                 </a:solidFill>
                 <a:latin typeface="Calibri"/>
               </a:rPr>
-              <a:t>65 suites</a:t>
+              <a:t>74 suites</a:t>
             </a:r>
           </a:p>
         </p:txBody>
@@ -19537,7 +19482,7 @@
                 </a:solidFill>
                 <a:latin typeface="Calibri"/>
               </a:rPr>
-              <a:t>1,287 tests</a:t>
+              <a:t>1,386 tests</a:t>
             </a:r>
           </a:p>
         </p:txBody>
@@ -19622,7 +19567,7 @@
                 </a:solidFill>
                 <a:latin typeface="Consolas"/>
               </a:rPr>
-              <a:t>Total</a:t>
+              <a:t>Total, incl. Deno</a:t>
             </a:r>
           </a:p>
         </p:txBody>
@@ -19661,7 +19606,7 @@
                 </a:solidFill>
                 <a:latin typeface="Calibri"/>
               </a:rPr>
-              <a:t>80 suites</a:t>
+              <a:t>91 suites</a:t>
             </a:r>
           </a:p>
         </p:txBody>
@@ -19700,7 +19645,7 @@
                 </a:solidFill>
                 <a:latin typeface="Calibri"/>
               </a:rPr>
-              <a:t>1,799 tests</a:t>
+              <a:t>1,934 tests</a:t>
             </a:r>
           </a:p>
         </p:txBody>
@@ -22973,7 +22918,7 @@
                 </a:solidFill>
                 <a:latin typeface="Calibri"/>
               </a:rPr>
-              <a:t>1,799</a:t>
+              <a:t>1,934</a:t>
             </a:r>
           </a:p>
         </p:txBody>
